--- a/content/2026-2/cea055-estatistica-probabilidade/16-tlc-estimacao-pontual/Aula_16_TLC_Estimacao_Pontual.pptx
+++ b/content/2026-2/cea055-estatistica-probabilidade/16-tlc-estimacao-pontual/Aula_16_TLC_Estimacao_Pontual.pptx
@@ -3871,7 +3871,7 @@
             </a:br>
             <a:r>
               <a:rPr lang="pt-BR" sz="2200" b="1" dirty="0"/>
-              <a:t>Estimação</a:t>
+              <a:t>Teorema do Limite Central e Estimação Pontual</a:t>
             </a:r>
             <a:endParaRPr lang="pt-BR" dirty="0">
               <a:latin typeface="AlternateGothic2 BT" panose="020B0608020202050204" pitchFamily="34" charset="0"/>
@@ -3893,8 +3893,8 @@
         </p:nvSpPr>
         <p:spPr>
           <a:xfrm>
-            <a:off x="881687" y="1506234"/>
-            <a:ext cx="10618651" cy="4401205"/>
+            <a:off x="881687" y="1441868"/>
+            <a:ext cx="10067277" cy="4295185"/>
           </a:xfrm>
           <a:prstGeom prst="rect">
             <a:avLst/>
@@ -3908,58 +3908,106 @@
           <a:lstStyle/>
           <a:p>
             <a:r>
-              <a:rPr lang="pt-BR" sz="2800" b="1" dirty="0"/>
-              <a:t>Inferência estatística</a:t>
-            </a:r>
-          </a:p>
-          <a:p>
-            <a:endParaRPr lang="pt-BR" sz="2800" b="1" dirty="0"/>
-          </a:p>
-          <a:p>
-            <a:pPr marL="457200" indent="-457200">
+              <a:rPr lang="pt-BR" sz="2400" b="1" dirty="0"/>
+              <a:t>Objetivos do aula:</a:t>
+            </a:r>
+          </a:p>
+          <a:p>
+            <a:pPr marL="285737" indent="-285737">
               <a:buFont typeface="Arial" panose="020B0604020202020204" pitchFamily="34" charset="0"/>
               <a:buChar char="•"/>
             </a:pPr>
             <a:r>
-              <a:rPr lang="pt-BR" sz="2800" dirty="0"/>
-              <a:t>Consiste do processo de estudar uma população através de uma amostra.</a:t>
-            </a:r>
-          </a:p>
-          <a:p>
-            <a:pPr marL="457200" indent="-457200">
+              <a:rPr lang="pt-BR" sz="2400" dirty="0"/>
+              <a:t>Compreender o Teorema do Limite Central e sua importância na inferência.</a:t>
+            </a:r>
+          </a:p>
+          <a:p>
+            <a:pPr marL="285737" indent="-285737">
               <a:buFont typeface="Arial" panose="020B0604020202020204" pitchFamily="34" charset="0"/>
               <a:buChar char="•"/>
             </a:pPr>
             <a:r>
-              <a:rPr lang="pt-BR" sz="2800" dirty="0"/>
-              <a:t>Levantam-se hipóteses baseados no conhecimento da população e de experimentos semelhantes realizados anteriormente.</a:t>
-            </a:r>
-          </a:p>
-          <a:p>
-            <a:pPr marL="457200" indent="-457200">
+              <a:rPr lang="pt-BR" sz="2400" dirty="0"/>
+              <a:t>Obter estimadores pontuais para a média e a proporção populacionais.</a:t>
+            </a:r>
+          </a:p>
+          <a:p>
+            <a:r>
+              <a:rPr lang="pt-BR" sz="2400" b="1" dirty="0"/>
+              <a:t xml:space="preserve">Referências: </a:t>
+            </a:r>
+          </a:p>
+          <a:p>
+            <a:pPr marL="457178" indent="-457178">
               <a:buFont typeface="Arial" panose="020B0604020202020204" pitchFamily="34" charset="0"/>
               <a:buChar char="•"/>
             </a:pPr>
             <a:r>
-              <a:rPr lang="pt-BR" sz="2800" dirty="0"/>
-              <a:t>As conclusões, portanto, terão um grau de incerteza ou risco.</a:t>
-            </a:r>
-          </a:p>
-          <a:p>
-            <a:pPr marL="457200" indent="-457200">
+              <a:rPr lang="pt-BR" sz="2000" dirty="0"/>
+              <a:t xml:space="preserve">Bussab, Morettin. </a:t>
+            </a:r>
+            <a:r>
+              <a:rPr lang="pt-BR" sz="2000" b="1" dirty="0"/>
+              <a:t>Estatística Básica</a:t>
+            </a:r>
+            <a:r>
+              <a:rPr lang="pt-BR" sz="2000" dirty="0"/>
+              <a:t>, 9ed — Cap. 10 (10.7); Cap. 11 (11.1)</a:t>
+            </a:r>
+          </a:p>
+          <a:p>
+            <a:pPr marL="457178" indent="-457178">
               <a:buFont typeface="Arial" panose="020B0604020202020204" pitchFamily="34" charset="0"/>
               <a:buChar char="•"/>
             </a:pPr>
-            <a:endParaRPr lang="pt-BR" sz="2800" dirty="0"/>
-          </a:p>
-          <a:p>
-            <a:pPr marL="457200" indent="-457200">
+            <a:r>
+              <a:rPr lang="pt-BR" sz="2000" dirty="0"/>
+              <a:t xml:space="preserve">Montgomery, Runger. </a:t>
+            </a:r>
+            <a:r>
+              <a:rPr lang="pt-BR" sz="2000" b="1" dirty="0"/>
+              <a:t>Applied Statistics and Probability for Engineers</a:t>
+            </a:r>
+            <a:r>
+              <a:rPr lang="pt-BR" sz="2000" dirty="0"/>
+              <a:t>, 7th ed — Cap. 7 (7.2, 7.3)</a:t>
+            </a:r>
+          </a:p>
+          <a:p>
+            <a:pPr marL="457178" indent="-457178">
               <a:buFont typeface="Arial" panose="020B0604020202020204" pitchFamily="34" charset="0"/>
               <a:buChar char="•"/>
             </a:pPr>
             <a:r>
-              <a:rPr lang="pt-BR" sz="2800" dirty="0"/>
-              <a:t>Esses processo (técnicas e procedimentos) é chamado de inferência estatística.</a:t>
+              <a:rPr lang="pt-BR" sz="2000" dirty="0"/>
+              <a:t xml:space="preserve">Magalhães, Lima. </a:t>
+            </a:r>
+            <a:r>
+              <a:rPr lang="pt-BR" sz="2000" b="1" dirty="0"/>
+              <a:t>Noções de Probabilidade e Estatística</a:t>
+            </a:r>
+            <a:r>
+              <a:rPr lang="pt-BR" sz="2000" dirty="0"/>
+              <a:t>, 5ed — Cap. 7 (7.3)</a:t>
+            </a:r>
+          </a:p>
+          <a:p>
+            <a:pPr marL="457178" indent="-457178">
+              <a:buFont typeface="Arial" panose="020B0604020202020204" pitchFamily="34" charset="0"/>
+              <a:buChar char="•"/>
+            </a:pPr>
+            <a:r>
+              <a:rPr lang="pt-BR" sz="2000" dirty="0"/>
+              <a:t xml:space="preserve">Morettin. </a:t>
+            </a:r>
+            <a:r>
+              <a:rPr lang="pt-BR" sz="2000" b="1" dirty="0"/>
+              <a:t>Estatística Básica: Probabilidade e Inferência</a:t>
+            </a:r>
+            <a:r>
+              <a:rPr lang="pt-BR" sz="2000" dirty="0"/>
+              <a:t xml:space="preserve"> — Cap. 9 (9.1); Cap. 10 (10.2, 10.3)</a:t>
             </a:r>
           </a:p>
         </p:txBody>
@@ -4038,7 +4086,7 @@
     </p:spTree>
     <p:extLst>
       <p:ext uri="{BB962C8B-B14F-4D97-AF65-F5344CB8AC3E}">
-        <p14:creationId xmlns:p14="http://schemas.microsoft.com/office/powerpoint/2010/main" val="2268963273"/>
+        <p14:creationId xmlns:p14="http://schemas.microsoft.com/office/powerpoint/2010/main" val="1670738953"/>
       </p:ext>
     </p:extLst>
   </p:cSld>
@@ -4065,56 +4113,486 @@
           <a:chExt cx="0" cy="0"/>
         </a:xfrm>
       </p:grpSpPr>
+      <mc:AlternateContent xmlns:mc="http://schemas.openxmlformats.org/markup-compatibility/2006">
+        <mc:Choice xmlns:a14="http://schemas.microsoft.com/office/drawing/2010/main" Requires="a14">
+          <p:sp>
+            <p:nvSpPr>
+              <p:cNvPr id="6" name="CaixaDeTexto 5">
+                <a:extLst>
+                  <a:ext uri="{FF2B5EF4-FFF2-40B4-BE49-F238E27FC236}">
+                    <a16:creationId xmlns:a16="http://schemas.microsoft.com/office/drawing/2014/main" id="{720B10DA-C761-4DEE-8D86-E170E1C2E981}"/>
+                  </a:ext>
+                </a:extLst>
+              </p:cNvPr>
+              <p:cNvSpPr txBox="1"/>
+              <p:nvPr/>
+            </p:nvSpPr>
+            <p:spPr>
+              <a:xfrm>
+                <a:off x="881687" y="1506234"/>
+                <a:ext cx="10618651" cy="3575979"/>
+              </a:xfrm>
+              <a:prstGeom prst="rect">
+                <a:avLst/>
+              </a:prstGeom>
+              <a:noFill/>
+            </p:spPr>
+            <p:txBody>
+              <a:bodyPr wrap="square" rtlCol="0">
+                <a:spAutoFit/>
+              </a:bodyPr>
+              <a:lstStyle/>
+              <a:p>
+                <a:r>
+                  <a:rPr lang="pt-BR" sz="2800" dirty="0"/>
+                  <a:t xml:space="preserve">c) Eficiência. </a:t>
+                </a:r>
+                <a:r>
+                  <a:rPr lang="pt-BR" sz="2800" b="1" dirty="0"/>
+                  <a:t xml:space="preserve"> </a:t>
+                </a:r>
+                <a:r>
+                  <a:rPr lang="pt-BR" sz="2800" dirty="0"/>
+                  <a:t xml:space="preserve">Se </a:t>
+                </a:r>
+                <a14:m>
+                  <m:oMath xmlns:m="http://schemas.openxmlformats.org/officeDocument/2006/math">
+                    <m:r>
+                      <a:rPr lang="pt-BR" sz="2800" i="1" dirty="0" smtClean="0">
+                        <a:latin typeface="Cambria Math" panose="02040503050406030204" pitchFamily="18" charset="0"/>
+                      </a:rPr>
+                      <m:t>𝑇</m:t>
+                    </m:r>
+                  </m:oMath>
+                </a14:m>
+                <a:r>
+                  <a:rPr lang="pt-BR" sz="2800" dirty="0"/>
+                  <a:t xml:space="preserve"> e </a:t>
+                </a:r>
+                <a14:m>
+                  <m:oMath xmlns:m="http://schemas.openxmlformats.org/officeDocument/2006/math">
+                    <m:r>
+                      <a:rPr lang="pt-BR" sz="2800" i="1" dirty="0" smtClean="0">
+                        <a:latin typeface="Cambria Math" panose="02040503050406030204" pitchFamily="18" charset="0"/>
+                      </a:rPr>
+                      <m:t>𝑇</m:t>
+                    </m:r>
+                    <m:r>
+                      <a:rPr lang="pt-BR" sz="2800" i="1" dirty="0" smtClean="0">
+                        <a:latin typeface="Cambria Math" panose="02040503050406030204" pitchFamily="18" charset="0"/>
+                      </a:rPr>
+                      <m:t>’</m:t>
+                    </m:r>
+                  </m:oMath>
+                </a14:m>
+                <a:r>
+                  <a:rPr lang="pt-BR" sz="2800" dirty="0"/>
+                  <a:t xml:space="preserve"> são dois estimadores não-viesados de um mesmo parâmetro </a:t>
+                </a:r>
+                <a14:m>
+                  <m:oMath xmlns:m="http://schemas.openxmlformats.org/officeDocument/2006/math">
+                    <m:r>
+                      <a:rPr lang="pt-BR" sz="2800" i="1" dirty="0" smtClean="0">
+                        <a:latin typeface="Cambria Math" panose="02040503050406030204" pitchFamily="18" charset="0"/>
+                      </a:rPr>
+                      <m:t>𝜃</m:t>
+                    </m:r>
+                  </m:oMath>
+                </a14:m>
+                <a:r>
+                  <a:rPr lang="pt-BR" sz="2800" dirty="0"/>
+                  <a:t xml:space="preserve">, e ainda </a:t>
+                </a:r>
+                <a:endParaRPr lang="pt-BR" sz="2800" i="1" dirty="0">
+                  <a:latin typeface="Cambria Math" panose="02040503050406030204" pitchFamily="18" charset="0"/>
+                </a:endParaRPr>
+              </a:p>
+              <a:p>
+                <a:pPr/>
+                <a14:m>
+                  <m:oMathPara xmlns:m="http://schemas.openxmlformats.org/officeDocument/2006/math">
+                    <m:oMathParaPr>
+                      <m:jc m:val="centerGroup"/>
+                    </m:oMathParaPr>
+                    <m:oMath xmlns:m="http://schemas.openxmlformats.org/officeDocument/2006/math">
+                      <m:r>
+                        <a:rPr lang="pt-BR" sz="2800" i="1" dirty="0" smtClean="0">
+                          <a:latin typeface="Cambria Math" panose="02040503050406030204" pitchFamily="18" charset="0"/>
+                        </a:rPr>
+                        <m:t>𝑉𝑎𝑟</m:t>
+                      </m:r>
+                      <m:d>
+                        <m:dPr>
+                          <m:ctrlPr>
+                            <a:rPr lang="pt-BR" sz="2800" i="1" dirty="0" smtClean="0">
+                              <a:latin typeface="Cambria Math" panose="02040503050406030204" pitchFamily="18" charset="0"/>
+                            </a:rPr>
+                          </m:ctrlPr>
+                        </m:dPr>
+                        <m:e>
+                          <m:r>
+                            <a:rPr lang="pt-BR" sz="2800" i="1" dirty="0" smtClean="0">
+                              <a:latin typeface="Cambria Math" panose="02040503050406030204" pitchFamily="18" charset="0"/>
+                            </a:rPr>
+                            <m:t>𝑇</m:t>
+                          </m:r>
+                        </m:e>
+                      </m:d>
+                      <m:r>
+                        <a:rPr lang="pt-BR" sz="2800" i="1" dirty="0" smtClean="0">
+                          <a:latin typeface="Cambria Math" panose="02040503050406030204" pitchFamily="18" charset="0"/>
+                        </a:rPr>
+                        <m:t>&lt; </m:t>
+                      </m:r>
+                      <m:r>
+                        <a:rPr lang="pt-BR" sz="2800" i="1" dirty="0" smtClean="0">
+                          <a:latin typeface="Cambria Math" panose="02040503050406030204" pitchFamily="18" charset="0"/>
+                        </a:rPr>
+                        <m:t>𝑉𝑎𝑟</m:t>
+                      </m:r>
+                      <m:d>
+                        <m:dPr>
+                          <m:ctrlPr>
+                            <a:rPr lang="pt-BR" sz="2800" i="1" dirty="0" smtClean="0">
+                              <a:latin typeface="Cambria Math" panose="02040503050406030204" pitchFamily="18" charset="0"/>
+                            </a:rPr>
+                          </m:ctrlPr>
+                        </m:dPr>
+                        <m:e>
+                          <m:r>
+                            <a:rPr lang="pt-BR" sz="2800" i="1" dirty="0" smtClean="0">
+                              <a:latin typeface="Cambria Math" panose="02040503050406030204" pitchFamily="18" charset="0"/>
+                            </a:rPr>
+                            <m:t>𝑇</m:t>
+                          </m:r>
+                          <m:r>
+                            <a:rPr lang="pt-BR" sz="2800" i="1" dirty="0" smtClean="0">
+                              <a:latin typeface="Cambria Math" panose="02040503050406030204" pitchFamily="18" charset="0"/>
+                            </a:rPr>
+                            <m:t>’</m:t>
+                          </m:r>
+                        </m:e>
+                      </m:d>
+                      <m:r>
+                        <a:rPr lang="pt-BR" sz="2800" b="0" i="1" dirty="0" smtClean="0">
+                          <a:latin typeface="Cambria Math" panose="02040503050406030204" pitchFamily="18" charset="0"/>
+                        </a:rPr>
+                        <m:t>,</m:t>
+                      </m:r>
+                    </m:oMath>
+                  </m:oMathPara>
+                </a14:m>
+                <a:endParaRPr lang="pt-BR" sz="2800" dirty="0"/>
+              </a:p>
+              <a:p>
+                <a:endParaRPr lang="pt-BR" sz="2800" dirty="0"/>
+              </a:p>
+              <a:p>
+                <a:r>
+                  <a:rPr lang="pt-BR" sz="2800" dirty="0"/>
+                  <a:t xml:space="preserve">então </a:t>
+                </a:r>
+                <a14:m>
+                  <m:oMath xmlns:m="http://schemas.openxmlformats.org/officeDocument/2006/math">
+                    <m:r>
+                      <a:rPr lang="pt-BR" sz="2800" i="1" dirty="0" smtClean="0">
+                        <a:latin typeface="Cambria Math" panose="02040503050406030204" pitchFamily="18" charset="0"/>
+                      </a:rPr>
+                      <m:t>𝑇</m:t>
+                    </m:r>
+                  </m:oMath>
+                </a14:m>
+                <a:r>
+                  <a:rPr lang="pt-BR" sz="2800" dirty="0"/>
+                  <a:t xml:space="preserve"> diz-se mais eficiente do que </a:t>
+                </a:r>
+                <a14:m>
+                  <m:oMath xmlns:m="http://schemas.openxmlformats.org/officeDocument/2006/math">
+                    <m:r>
+                      <a:rPr lang="pt-BR" sz="2800" i="1" dirty="0" smtClean="0">
+                        <a:latin typeface="Cambria Math" panose="02040503050406030204" pitchFamily="18" charset="0"/>
+                      </a:rPr>
+                      <m:t>𝑇</m:t>
+                    </m:r>
+                    <m:r>
+                      <a:rPr lang="pt-BR" sz="2800" i="1" dirty="0" smtClean="0">
+                        <a:latin typeface="Cambria Math" panose="02040503050406030204" pitchFamily="18" charset="0"/>
+                      </a:rPr>
+                      <m:t>’</m:t>
+                    </m:r>
+                  </m:oMath>
+                </a14:m>
+                <a:r>
+                  <a:rPr lang="pt-BR" sz="2800" dirty="0"/>
+                  <a:t>.</a:t>
+                </a:r>
+              </a:p>
+              <a:p>
+                <a:endParaRPr lang="pt-BR" sz="2800" dirty="0"/>
+              </a:p>
+              <a:p>
+                <a:r>
+                  <a:rPr lang="pt-BR" sz="2800" dirty="0"/>
+                  <a:t xml:space="preserve">d) Suficiência. O estimador </a:t>
+                </a:r>
+                <a14:m>
+                  <m:oMath xmlns:m="http://schemas.openxmlformats.org/officeDocument/2006/math">
+                    <m:acc>
+                      <m:accPr>
+                        <m:chr m:val="̂"/>
+                        <m:ctrlPr>
+                          <a:rPr lang="pt-BR" sz="2800" i="1" smtClean="0">
+                            <a:latin typeface="Cambria Math" panose="02040503050406030204" pitchFamily="18" charset="0"/>
+                          </a:rPr>
+                        </m:ctrlPr>
+                      </m:accPr>
+                      <m:e>
+                        <m:r>
+                          <a:rPr lang="pt-BR" sz="2800" b="0" i="1" smtClean="0">
+                            <a:latin typeface="Cambria Math" panose="02040503050406030204" pitchFamily="18" charset="0"/>
+                          </a:rPr>
+                          <m:t>𝜃</m:t>
+                        </m:r>
+                      </m:e>
+                    </m:acc>
+                  </m:oMath>
+                </a14:m>
+                <a:r>
+                  <a:rPr lang="pt-BR" sz="2800" dirty="0"/>
+                  <a:t xml:space="preserve"> de </a:t>
+                </a:r>
+                <a14:m>
+                  <m:oMath xmlns:m="http://schemas.openxmlformats.org/officeDocument/2006/math">
+                    <m:r>
+                      <a:rPr lang="pt-BR" sz="2800" b="0" i="1" smtClean="0">
+                        <a:latin typeface="Cambria Math" panose="02040503050406030204" pitchFamily="18" charset="0"/>
+                      </a:rPr>
+                      <m:t>𝜃</m:t>
+                    </m:r>
+                  </m:oMath>
+                </a14:m>
+                <a:r>
+                  <a:rPr lang="pt-BR" sz="2800" dirty="0"/>
+                  <a:t xml:space="preserve"> é suficiente se, para qualquer outro estimador </a:t>
+                </a:r>
+                <a14:m>
+                  <m:oMath xmlns:m="http://schemas.openxmlformats.org/officeDocument/2006/math">
+                    <m:sSub>
+                      <m:sSubPr>
+                        <m:ctrlPr>
+                          <a:rPr lang="pt-BR" sz="2800" b="0" i="1" smtClean="0">
+                            <a:latin typeface="Cambria Math" panose="02040503050406030204" pitchFamily="18" charset="0"/>
+                          </a:rPr>
+                        </m:ctrlPr>
+                      </m:sSubPr>
+                      <m:e>
+                        <m:acc>
+                          <m:accPr>
+                            <m:chr m:val="̂"/>
+                            <m:ctrlPr>
+                              <a:rPr lang="pt-BR" sz="2800" i="1">
+                                <a:latin typeface="Cambria Math" panose="02040503050406030204" pitchFamily="18" charset="0"/>
+                              </a:rPr>
+                            </m:ctrlPr>
+                          </m:accPr>
+                          <m:e>
+                            <m:r>
+                              <a:rPr lang="pt-BR" sz="2800" i="1">
+                                <a:latin typeface="Cambria Math" panose="02040503050406030204" pitchFamily="18" charset="0"/>
+                              </a:rPr>
+                              <m:t>𝜃</m:t>
+                            </m:r>
+                          </m:e>
+                        </m:acc>
+                      </m:e>
+                      <m:sub>
+                        <m:r>
+                          <a:rPr lang="pt-BR" sz="2800" b="0" i="1" smtClean="0">
+                            <a:latin typeface="Cambria Math" panose="02040503050406030204" pitchFamily="18" charset="0"/>
+                          </a:rPr>
+                          <m:t>𝑘</m:t>
+                        </m:r>
+                      </m:sub>
+                    </m:sSub>
+                  </m:oMath>
+                </a14:m>
+                <a:r>
+                  <a:rPr lang="pt-BR" sz="2800" dirty="0"/>
+                  <a:t xml:space="preserve">, a distribuição de </a:t>
+                </a:r>
+                <a14:m>
+                  <m:oMath xmlns:m="http://schemas.openxmlformats.org/officeDocument/2006/math">
+                    <m:sSub>
+                      <m:sSubPr>
+                        <m:ctrlPr>
+                          <a:rPr lang="pt-BR" sz="2800" i="1">
+                            <a:latin typeface="Cambria Math" panose="02040503050406030204" pitchFamily="18" charset="0"/>
+                          </a:rPr>
+                        </m:ctrlPr>
+                      </m:sSubPr>
+                      <m:e>
+                        <m:acc>
+                          <m:accPr>
+                            <m:chr m:val="̂"/>
+                            <m:ctrlPr>
+                              <a:rPr lang="pt-BR" sz="2800" i="1">
+                                <a:latin typeface="Cambria Math" panose="02040503050406030204" pitchFamily="18" charset="0"/>
+                              </a:rPr>
+                            </m:ctrlPr>
+                          </m:accPr>
+                          <m:e>
+                            <m:r>
+                              <a:rPr lang="pt-BR" sz="2800" i="1">
+                                <a:latin typeface="Cambria Math" panose="02040503050406030204" pitchFamily="18" charset="0"/>
+                              </a:rPr>
+                              <m:t>𝜃</m:t>
+                            </m:r>
+                          </m:e>
+                        </m:acc>
+                      </m:e>
+                      <m:sub>
+                        <m:r>
+                          <a:rPr lang="pt-BR" sz="2800" i="1">
+                            <a:latin typeface="Cambria Math" panose="02040503050406030204" pitchFamily="18" charset="0"/>
+                          </a:rPr>
+                          <m:t>𝑘</m:t>
+                        </m:r>
+                      </m:sub>
+                    </m:sSub>
+                  </m:oMath>
+                </a14:m>
+                <a:r>
+                  <a:rPr lang="pt-BR" sz="2800" dirty="0"/>
+                  <a:t xml:space="preserve"> for independente de </a:t>
+                </a:r>
+                <a14:m>
+                  <m:oMath xmlns:m="http://schemas.openxmlformats.org/officeDocument/2006/math">
+                    <m:r>
+                      <a:rPr lang="pt-BR" sz="2800" b="0" i="1" dirty="0" smtClean="0">
+                        <a:latin typeface="Cambria Math" panose="02040503050406030204" pitchFamily="18" charset="0"/>
+                      </a:rPr>
+                      <m:t>𝜃</m:t>
+                    </m:r>
+                  </m:oMath>
+                </a14:m>
+                <a:r>
+                  <a:rPr lang="pt-BR" sz="2800" dirty="0"/>
+                  <a:t>.</a:t>
+                </a:r>
+              </a:p>
+            </p:txBody>
+          </p:sp>
+        </mc:Choice>
+        <mc:Fallback>
+          <p:sp>
+            <p:nvSpPr>
+              <p:cNvPr id="6" name="CaixaDeTexto 5">
+                <a:extLst>
+                  <a:ext uri="{FF2B5EF4-FFF2-40B4-BE49-F238E27FC236}">
+                    <a16:creationId xmlns:a16="http://schemas.microsoft.com/office/drawing/2014/main" id="{720B10DA-C761-4DEE-8D86-E170E1C2E981}"/>
+                  </a:ext>
+                </a:extLst>
+              </p:cNvPr>
+              <p:cNvSpPr txBox="1">
+                <a:spLocks noRot="1" noChangeAspect="1" noMove="1" noResize="1" noEditPoints="1" noAdjustHandles="1" noChangeArrowheads="1" noChangeShapeType="1" noTextEdit="1"/>
+              </p:cNvSpPr>
+              <p:nvPr/>
+            </p:nvSpPr>
+            <p:spPr>
+              <a:xfrm>
+                <a:off x="881687" y="1506234"/>
+                <a:ext cx="10618651" cy="3575979"/>
+              </a:xfrm>
+              <a:prstGeom prst="rect">
+                <a:avLst/>
+              </a:prstGeom>
+              <a:blipFill>
+                <a:blip r:embed="rId2"/>
+                <a:stretch>
+                  <a:fillRect l="-1206" t="-1533" b="-3918"/>
+                </a:stretch>
+              </a:blipFill>
+            </p:spPr>
+            <p:txBody>
+              <a:bodyPr/>
+              <a:lstStyle/>
+              <a:p>
+                <a:r>
+                  <a:rPr lang="pt-BR">
+                    <a:noFill/>
+                  </a:rPr>
+                  <a:t> </a:t>
+                </a:r>
+              </a:p>
+            </p:txBody>
+          </p:sp>
+        </mc:Fallback>
+      </mc:AlternateContent>
       <p:sp>
         <p:nvSpPr>
-          <p:cNvPr id="2" name="Título 1">
+          <p:cNvPr id="3" name="CaixaDeTexto 2">
             <a:extLst>
               <a:ext uri="{FF2B5EF4-FFF2-40B4-BE49-F238E27FC236}">
-                <a16:creationId xmlns:a16="http://schemas.microsoft.com/office/drawing/2014/main" id="{BC798918-7CB4-450A-A042-F0B538CA25DE}"/>
+                <a16:creationId xmlns:a16="http://schemas.microsoft.com/office/drawing/2014/main" id="{19131A04-B5D6-4211-8B49-4615DE5797E9}"/>
               </a:ext>
             </a:extLst>
           </p:cNvPr>
-          <p:cNvSpPr>
-            <a:spLocks noGrp="1"/>
-          </p:cNvSpPr>
-          <p:nvPr>
-            <p:ph type="title"/>
-          </p:nvPr>
+          <p:cNvSpPr txBox="1"/>
+          <p:nvPr/>
         </p:nvSpPr>
         <p:spPr>
           <a:xfrm>
-            <a:off x="1032611" y="0"/>
-            <a:ext cx="10827959" cy="1574800"/>
+            <a:off x="361395" y="6488668"/>
+            <a:ext cx="7620000" cy="300210"/>
           </a:xfrm>
+          <a:prstGeom prst="rect">
+            <a:avLst/>
+          </a:prstGeom>
+          <a:noFill/>
         </p:spPr>
         <p:txBody>
-          <a:bodyPr>
-            <a:normAutofit/>
+          <a:bodyPr wrap="none" rtlCol="0">
+            <a:spAutoFit/>
           </a:bodyPr>
           <a:lstStyle/>
           <a:p>
-            <a:pPr algn="ctr"/>
-            <a:r>
-              <a:rPr lang="pt-BR" dirty="0">
-                <a:latin typeface="AlternateGothic2 BT" panose="020B0608020202050204" pitchFamily="34" charset="0"/>
-              </a:rPr>
-              <a:t>CEA055 – Estatística e Probabilidade</a:t>
-            </a:r>
-            <a:br>
-              <a:rPr lang="pt-BR" dirty="0">
-                <a:latin typeface="AlternateGothic2 BT" panose="020B0608020202050204" pitchFamily="34" charset="0"/>
-              </a:rPr>
-            </a:br>
-            <a:r>
-              <a:rPr lang="pt-BR" sz="2200" b="1" dirty="0"/>
-              <a:t>Estimação</a:t>
-            </a:r>
-            <a:endParaRPr lang="pt-BR" dirty="0">
-              <a:latin typeface="AlternateGothic2 BT" panose="020B0608020202050204" pitchFamily="34" charset="0"/>
-            </a:endParaRPr>
+            <a:r>
+              <a:rPr lang="pt-BR" sz="1351" dirty="0"/>
+              <a:t>CEA055 - Estatística e Probabilidade - Professor: Marcos Goulart Lima</a:t>
+            </a:r>
           </a:p>
         </p:txBody>
       </p:sp>
+    </p:spTree>
+    <p:extLst>
+      <p:ext uri="{BB962C8B-B14F-4D97-AF65-F5344CB8AC3E}">
+        <p14:creationId xmlns:p14="http://schemas.microsoft.com/office/powerpoint/2010/main" val="4211534115"/>
+      </p:ext>
+    </p:extLst>
+  </p:cSld>
+  <p:clrMapOvr>
+    <a:masterClrMapping/>
+  </p:clrMapOvr>
+</p:sld>
+</file>
+
+<file path=ppt/slides/slide11.xml><?xml version="1.0" encoding="utf-8"?>
+<p:sld xmlns:a="http://schemas.openxmlformats.org/drawingml/2006/main" xmlns:r="http://schemas.openxmlformats.org/officeDocument/2006/relationships" xmlns:p="http://schemas.openxmlformats.org/presentationml/2006/main">
+  <p:cSld>
+    <p:spTree>
+      <p:nvGrpSpPr>
+        <p:cNvPr id="1" name=""/>
+        <p:cNvGrpSpPr/>
+        <p:nvPr/>
+      </p:nvGrpSpPr>
+      <p:grpSpPr>
+        <a:xfrm>
+          <a:off x="0" y="0"/>
+          <a:ext cx="0" cy="0"/>
+          <a:chOff x="0" y="0"/>
+          <a:chExt cx="0" cy="0"/>
+        </a:xfrm>
+      </p:grpSpPr>
       <mc:AlternateContent xmlns:mc="http://schemas.openxmlformats.org/markup-compatibility/2006">
         <mc:Choice xmlns:a14="http://schemas.microsoft.com/office/drawing/2010/main" Requires="a14">
           <p:sp>
@@ -4373,7 +4851,7 @@
         <p:spPr>
           <a:xfrm>
             <a:off x="361395" y="6488668"/>
-            <a:ext cx="2395336" cy="300210"/>
+            <a:ext cx="7620000" cy="300210"/>
           </a:xfrm>
           <a:prstGeom prst="rect">
             <a:avLst/>
@@ -4388,47 +4866,11 @@
           <a:p>
             <a:r>
               <a:rPr lang="pt-BR" sz="1351" dirty="0"/>
-              <a:t>Professor: Marcos Goulart Lima</a:t>
+              <a:t>CEA055 - Estatística e Probabilidade - Professor: Marcos Goulart Lima</a:t>
             </a:r>
           </a:p>
         </p:txBody>
       </p:sp>
-      <p:pic>
-        <p:nvPicPr>
-          <p:cNvPr id="8" name="Espaço Reservado para Conteúdo 4">
-            <a:extLst>
-              <a:ext uri="{FF2B5EF4-FFF2-40B4-BE49-F238E27FC236}">
-                <a16:creationId xmlns:a16="http://schemas.microsoft.com/office/drawing/2014/main" id="{65AB402D-D1A8-4F31-BA42-34A6F0FC69F9}"/>
-              </a:ext>
-            </a:extLst>
-          </p:cNvPr>
-          <p:cNvPicPr>
-            <a:picLocks noChangeAspect="1"/>
-          </p:cNvPicPr>
-          <p:nvPr/>
-        </p:nvPicPr>
-        <p:blipFill>
-          <a:blip r:embed="rId3">
-            <a:extLst>
-              <a:ext uri="{28A0092B-C50C-407E-A947-70E740481C1C}">
-                <a14:useLocalDpi xmlns:a14="http://schemas.microsoft.com/office/drawing/2010/main" val="0"/>
-              </a:ext>
-            </a:extLst>
-          </a:blip>
-          <a:stretch>
-            <a:fillRect/>
-          </a:stretch>
-        </p:blipFill>
-        <p:spPr>
-          <a:xfrm>
-            <a:off x="62144" y="112237"/>
-            <a:ext cx="588096" cy="1228523"/>
-          </a:xfrm>
-          <a:prstGeom prst="rect">
-            <a:avLst/>
-          </a:prstGeom>
-        </p:spPr>
-      </p:pic>
     </p:spTree>
     <p:extLst>
       <p:ext uri="{BB962C8B-B14F-4D97-AF65-F5344CB8AC3E}">
@@ -4442,7 +4884,7 @@
 </p:sld>
 </file>
 
-<file path=ppt/slides/slide11.xml><?xml version="1.0" encoding="utf-8"?>
+<file path=ppt/slides/slide12.xml><?xml version="1.0" encoding="utf-8"?>
 <p:sld xmlns:a="http://schemas.openxmlformats.org/drawingml/2006/main" xmlns:r="http://schemas.openxmlformats.org/officeDocument/2006/relationships" xmlns:p="http://schemas.openxmlformats.org/presentationml/2006/main">
   <p:cSld>
     <p:spTree>
@@ -4459,56 +4901,6 @@
           <a:chExt cx="0" cy="0"/>
         </a:xfrm>
       </p:grpSpPr>
-      <p:sp>
-        <p:nvSpPr>
-          <p:cNvPr id="2" name="Título 1">
-            <a:extLst>
-              <a:ext uri="{FF2B5EF4-FFF2-40B4-BE49-F238E27FC236}">
-                <a16:creationId xmlns:a16="http://schemas.microsoft.com/office/drawing/2014/main" id="{BC798918-7CB4-450A-A042-F0B538CA25DE}"/>
-              </a:ext>
-            </a:extLst>
-          </p:cNvPr>
-          <p:cNvSpPr>
-            <a:spLocks noGrp="1"/>
-          </p:cNvSpPr>
-          <p:nvPr>
-            <p:ph type="title"/>
-          </p:nvPr>
-        </p:nvSpPr>
-        <p:spPr>
-          <a:xfrm>
-            <a:off x="1032611" y="2"/>
-            <a:ext cx="10827959" cy="1641228"/>
-          </a:xfrm>
-        </p:spPr>
-        <p:txBody>
-          <a:bodyPr>
-            <a:normAutofit/>
-          </a:bodyPr>
-          <a:lstStyle/>
-          <a:p>
-            <a:pPr algn="ctr"/>
-            <a:r>
-              <a:rPr lang="pt-BR" dirty="0">
-                <a:latin typeface="AlternateGothic2 BT" panose="020B0608020202050204" pitchFamily="34" charset="0"/>
-              </a:rPr>
-              <a:t>CEA055 – Estatística e Probabilidade</a:t>
-            </a:r>
-            <a:br>
-              <a:rPr lang="pt-BR" dirty="0">
-                <a:latin typeface="AlternateGothic2 BT" panose="020B0608020202050204" pitchFamily="34" charset="0"/>
-              </a:rPr>
-            </a:br>
-            <a:r>
-              <a:rPr lang="pt-BR" sz="2200" b="1" dirty="0"/>
-              <a:t>Estimação</a:t>
-            </a:r>
-            <a:endParaRPr lang="pt-BR" dirty="0">
-              <a:latin typeface="AlternateGothic2 BT" panose="020B0608020202050204" pitchFamily="34" charset="0"/>
-            </a:endParaRPr>
-          </a:p>
-        </p:txBody>
-      </p:sp>
       <p:pic>
         <p:nvPicPr>
           <p:cNvPr id="5" name="Espaço Reservado para Conteúdo 4">
@@ -4619,7 +5011,7 @@
         <p:spPr>
           <a:xfrm>
             <a:off x="361395" y="6488668"/>
-            <a:ext cx="2348848" cy="300210"/>
+            <a:ext cx="7620000" cy="300210"/>
           </a:xfrm>
           <a:prstGeom prst="rect">
             <a:avLst/>
@@ -4638,7 +5030,7 @@
                   <a:schemeClr val="bg1"/>
                 </a:solidFill>
               </a:rPr>
-              <a:t>Professor Marcos Goulart Lima</a:t>
+              <a:t>CEA055 - Estatística e Probabilidade - Professor: Marcos Goulart Lima</a:t>
             </a:r>
           </a:p>
         </p:txBody>
@@ -4647,6 +5039,168 @@
     <p:extLst>
       <p:ext uri="{BB962C8B-B14F-4D97-AF65-F5344CB8AC3E}">
         <p14:creationId xmlns:p14="http://schemas.microsoft.com/office/powerpoint/2010/main" val="349395342"/>
+      </p:ext>
+    </p:extLst>
+  </p:cSld>
+  <p:clrMapOvr>
+    <a:masterClrMapping/>
+  </p:clrMapOvr>
+</p:sld>
+</file>
+
+<file path=ppt/slides/slide13.xml><?xml version="1.0" encoding="utf-8"?>
+<p:sld xmlns:a="http://schemas.openxmlformats.org/drawingml/2006/main" xmlns:r="http://schemas.openxmlformats.org/officeDocument/2006/relationships" xmlns:p="http://schemas.openxmlformats.org/presentationml/2006/main">
+  <p:cSld>
+    <p:spTree>
+      <p:nvGrpSpPr>
+        <p:cNvPr id="1" name=""/>
+        <p:cNvGrpSpPr/>
+        <p:nvPr/>
+      </p:nvGrpSpPr>
+      <p:grpSpPr>
+        <a:xfrm>
+          <a:off x="0" y="0"/>
+          <a:ext cx="0" cy="0"/>
+          <a:chOff x="0" y="0"/>
+          <a:chExt cx="0" cy="0"/>
+        </a:xfrm>
+      </p:grpSpPr>
+      <p:sp>
+        <p:nvSpPr>
+          <p:cNvPr id="6" name="CaixaDeTexto 5">
+            <a:extLst>
+              <a:ext uri="{FF2B5EF4-FFF2-40B4-BE49-F238E27FC236}">
+                <a16:creationId xmlns:a16="http://schemas.microsoft.com/office/drawing/2014/main" id="{720B10DA-C761-4DEE-8D86-E170E1C2E981}"/>
+              </a:ext>
+            </a:extLst>
+          </p:cNvPr>
+          <p:cNvSpPr txBox="1"/>
+          <p:nvPr/>
+        </p:nvSpPr>
+        <p:spPr>
+          <a:xfrm>
+            <a:off x="881687" y="1441868"/>
+            <a:ext cx="10067277" cy="4295185"/>
+          </a:xfrm>
+          <a:prstGeom prst="rect">
+            <a:avLst/>
+          </a:prstGeom>
+          <a:noFill/>
+        </p:spPr>
+        <p:txBody>
+          <a:bodyPr wrap="square" rtlCol="0">
+            <a:spAutoFit/>
+          </a:bodyPr>
+          <a:lstStyle/>
+          <a:p>
+            <a:r>
+              <a:rPr lang="pt-BR" sz="2400" b="1" dirty="0"/>
+              <a:t>Atividades referentes à aula</a:t>
+            </a:r>
+          </a:p>
+          <a:p>
+            <a:r>
+              <a:rPr lang="pt-BR" sz="2000" dirty="0"/>
+              <a:t xml:space="preserve">Leitura recomendada: </a:t>
+            </a:r>
+          </a:p>
+          <a:p>
+            <a:pPr marL="457178" indent="-457178">
+              <a:buFont typeface="Arial" panose="020B0604020202020204" pitchFamily="34" charset="0"/>
+              <a:buChar char="•"/>
+            </a:pPr>
+            <a:r>
+              <a:rPr lang="pt-BR" sz="2000" dirty="0"/>
+              <a:t>Bussab &amp; Morettin — Cap. 10: 10.7; Cap. 11: 11.1</a:t>
+            </a:r>
+          </a:p>
+          <a:p>
+            <a:pPr marL="457178" indent="-457178">
+              <a:buFont typeface="Arial" panose="020B0604020202020204" pitchFamily="34" charset="0"/>
+              <a:buChar char="•"/>
+            </a:pPr>
+            <a:r>
+              <a:rPr lang="pt-BR" sz="2000" dirty="0"/>
+              <a:t>Montgomery &amp; Runger — Cap. 7: 7.2, 7.3</a:t>
+            </a:r>
+          </a:p>
+          <a:p>
+            <a:pPr marL="457178" indent="-457178">
+              <a:buFont typeface="Arial" panose="020B0604020202020204" pitchFamily="34" charset="0"/>
+              <a:buChar char="•"/>
+            </a:pPr>
+            <a:r>
+              <a:rPr lang="pt-BR" sz="2000" dirty="0"/>
+              <a:t>Magalhães &amp; Lima — Cap. 7: 7.3</a:t>
+            </a:r>
+          </a:p>
+          <a:p>
+            <a:pPr marL="457178" indent="-457178">
+              <a:buFont typeface="Arial" panose="020B0604020202020204" pitchFamily="34" charset="0"/>
+              <a:buChar char="•"/>
+            </a:pPr>
+            <a:r>
+              <a:rPr lang="pt-BR" sz="2000" dirty="0"/>
+              <a:t>Morettin — Cap. 9: 9.1; Cap. 10: 10.2, 10.3</a:t>
+            </a:r>
+          </a:p>
+          <a:p>
+            <a:r>
+              <a:rPr lang="pt-BR" sz="2000" dirty="0"/>
+              <a:t>Exercícios recomendados:</a:t>
+            </a:r>
+          </a:p>
+          <a:p>
+            <a:pPr marL="457178" indent="-457178">
+              <a:buFont typeface="Arial" panose="020B0604020202020204" pitchFamily="34" charset="0"/>
+              <a:buChar char="•"/>
+            </a:pPr>
+            <a:r>
+              <a:rPr lang="pt-BR" sz="2000" dirty="0"/>
+              <a:t>Bussab, Cap. 10 e 11: exercícios sobre distribuição amostral e estimação pontual</a:t>
+            </a:r>
+          </a:p>
+        </p:txBody>
+      </p:sp>
+      <p:sp>
+        <p:nvSpPr>
+          <p:cNvPr id="3" name="CaixaDeTexto 2">
+            <a:extLst>
+              <a:ext uri="{FF2B5EF4-FFF2-40B4-BE49-F238E27FC236}">
+                <a16:creationId xmlns:a16="http://schemas.microsoft.com/office/drawing/2014/main" id="{19131A04-B5D6-4211-8B49-4615DE5797E9}"/>
+              </a:ext>
+            </a:extLst>
+          </p:cNvPr>
+          <p:cNvSpPr txBox="1"/>
+          <p:nvPr/>
+        </p:nvSpPr>
+        <p:spPr>
+          <a:xfrm>
+            <a:off x="361395" y="6488668"/>
+            <a:ext cx="7620000" cy="300210"/>
+          </a:xfrm>
+          <a:prstGeom prst="rect">
+            <a:avLst/>
+          </a:prstGeom>
+          <a:noFill/>
+        </p:spPr>
+        <p:txBody>
+          <a:bodyPr wrap="none" rtlCol="0">
+            <a:spAutoFit/>
+          </a:bodyPr>
+          <a:lstStyle/>
+          <a:p>
+            <a:r>
+              <a:rPr lang="pt-BR" sz="1351" dirty="0"/>
+              <a:t>CEA055 - Estatística e Probabilidade - Professor: Marcos Goulart Lima</a:t>
+            </a:r>
+          </a:p>
+        </p:txBody>
+      </p:sp>
+    </p:spTree>
+    <p:extLst>
+      <p:ext uri="{BB962C8B-B14F-4D97-AF65-F5344CB8AC3E}">
+        <p14:creationId xmlns:p14="http://schemas.microsoft.com/office/powerpoint/2010/main" val="1670738953"/>
       </p:ext>
     </p:extLst>
   </p:cSld>
@@ -4675,54 +5229,154 @@
       </p:grpSpPr>
       <p:sp>
         <p:nvSpPr>
-          <p:cNvPr id="2" name="Título 1">
+          <p:cNvPr id="6" name="CaixaDeTexto 5">
             <a:extLst>
               <a:ext uri="{FF2B5EF4-FFF2-40B4-BE49-F238E27FC236}">
-                <a16:creationId xmlns:a16="http://schemas.microsoft.com/office/drawing/2014/main" id="{BC798918-7CB4-450A-A042-F0B538CA25DE}"/>
+                <a16:creationId xmlns:a16="http://schemas.microsoft.com/office/drawing/2014/main" id="{720B10DA-C761-4DEE-8D86-E170E1C2E981}"/>
               </a:ext>
             </a:extLst>
           </p:cNvPr>
-          <p:cNvSpPr>
-            <a:spLocks noGrp="1"/>
-          </p:cNvSpPr>
-          <p:nvPr>
-            <p:ph type="title"/>
-          </p:nvPr>
+          <p:cNvSpPr txBox="1"/>
+          <p:nvPr/>
         </p:nvSpPr>
         <p:spPr>
           <a:xfrm>
-            <a:off x="1032611" y="0"/>
-            <a:ext cx="10827959" cy="1574800"/>
+            <a:off x="881687" y="1506234"/>
+            <a:ext cx="10618651" cy="4401205"/>
           </a:xfrm>
+          <a:prstGeom prst="rect">
+            <a:avLst/>
+          </a:prstGeom>
+          <a:noFill/>
         </p:spPr>
         <p:txBody>
-          <a:bodyPr>
-            <a:normAutofit/>
+          <a:bodyPr wrap="square" rtlCol="0">
+            <a:spAutoFit/>
           </a:bodyPr>
           <a:lstStyle/>
           <a:p>
-            <a:pPr algn="ctr"/>
-            <a:r>
-              <a:rPr lang="pt-BR" dirty="0">
-                <a:latin typeface="AlternateGothic2 BT" panose="020B0608020202050204" pitchFamily="34" charset="0"/>
-              </a:rPr>
-              <a:t>CEA055 – Estatística e Probabilidade</a:t>
-            </a:r>
-            <a:br>
-              <a:rPr lang="pt-BR" dirty="0">
-                <a:latin typeface="AlternateGothic2 BT" panose="020B0608020202050204" pitchFamily="34" charset="0"/>
-              </a:rPr>
-            </a:br>
-            <a:r>
-              <a:rPr lang="pt-BR" sz="2200" b="1" dirty="0"/>
-              <a:t>Estimação</a:t>
-            </a:r>
-            <a:endParaRPr lang="pt-BR" dirty="0">
-              <a:latin typeface="AlternateGothic2 BT" panose="020B0608020202050204" pitchFamily="34" charset="0"/>
-            </a:endParaRPr>
+            <a:r>
+              <a:rPr lang="pt-BR" sz="2800" b="1" dirty="0"/>
+              <a:t>Inferência estatística</a:t>
+            </a:r>
+          </a:p>
+          <a:p>
+            <a:endParaRPr lang="pt-BR" sz="2800" b="1" dirty="0"/>
+          </a:p>
+          <a:p>
+            <a:pPr marL="457200" indent="-457200">
+              <a:buFont typeface="Arial" panose="020B0604020202020204" pitchFamily="34" charset="0"/>
+              <a:buChar char="•"/>
+            </a:pPr>
+            <a:r>
+              <a:rPr lang="pt-BR" sz="2800" dirty="0"/>
+              <a:t>Consiste do processo de estudar uma população através de uma amostra.</a:t>
+            </a:r>
+          </a:p>
+          <a:p>
+            <a:pPr marL="457200" indent="-457200">
+              <a:buFont typeface="Arial" panose="020B0604020202020204" pitchFamily="34" charset="0"/>
+              <a:buChar char="•"/>
+            </a:pPr>
+            <a:r>
+              <a:rPr lang="pt-BR" sz="2800" dirty="0"/>
+              <a:t>Levantam-se hipóteses baseados no conhecimento da população e de experimentos semelhantes realizados anteriormente.</a:t>
+            </a:r>
+          </a:p>
+          <a:p>
+            <a:pPr marL="457200" indent="-457200">
+              <a:buFont typeface="Arial" panose="020B0604020202020204" pitchFamily="34" charset="0"/>
+              <a:buChar char="•"/>
+            </a:pPr>
+            <a:r>
+              <a:rPr lang="pt-BR" sz="2800" dirty="0"/>
+              <a:t>As conclusões, portanto, terão um grau de incerteza ou risco.</a:t>
+            </a:r>
+          </a:p>
+          <a:p>
+            <a:pPr marL="457200" indent="-457200">
+              <a:buFont typeface="Arial" panose="020B0604020202020204" pitchFamily="34" charset="0"/>
+              <a:buChar char="•"/>
+            </a:pPr>
+            <a:endParaRPr lang="pt-BR" sz="2800" dirty="0"/>
+          </a:p>
+          <a:p>
+            <a:pPr marL="457200" indent="-457200">
+              <a:buFont typeface="Arial" panose="020B0604020202020204" pitchFamily="34" charset="0"/>
+              <a:buChar char="•"/>
+            </a:pPr>
+            <a:r>
+              <a:rPr lang="pt-BR" sz="2800" dirty="0"/>
+              <a:t>Esses processo (técnicas e procedimentos) é chamado de inferência estatística.</a:t>
+            </a:r>
           </a:p>
         </p:txBody>
       </p:sp>
+      <p:sp>
+        <p:nvSpPr>
+          <p:cNvPr id="3" name="CaixaDeTexto 2">
+            <a:extLst>
+              <a:ext uri="{FF2B5EF4-FFF2-40B4-BE49-F238E27FC236}">
+                <a16:creationId xmlns:a16="http://schemas.microsoft.com/office/drawing/2014/main" id="{19131A04-B5D6-4211-8B49-4615DE5797E9}"/>
+              </a:ext>
+            </a:extLst>
+          </p:cNvPr>
+          <p:cNvSpPr txBox="1"/>
+          <p:nvPr/>
+        </p:nvSpPr>
+        <p:spPr>
+          <a:xfrm>
+            <a:off x="361395" y="6488668"/>
+            <a:ext cx="7620000" cy="300210"/>
+          </a:xfrm>
+          <a:prstGeom prst="rect">
+            <a:avLst/>
+          </a:prstGeom>
+          <a:noFill/>
+        </p:spPr>
+        <p:txBody>
+          <a:bodyPr wrap="none" rtlCol="0">
+            <a:spAutoFit/>
+          </a:bodyPr>
+          <a:lstStyle/>
+          <a:p>
+            <a:r>
+              <a:rPr lang="pt-BR" sz="1351" dirty="0"/>
+              <a:t>CEA055 - Estatística e Probabilidade - Professor: Marcos Goulart Lima</a:t>
+            </a:r>
+          </a:p>
+        </p:txBody>
+      </p:sp>
+    </p:spTree>
+    <p:extLst>
+      <p:ext uri="{BB962C8B-B14F-4D97-AF65-F5344CB8AC3E}">
+        <p14:creationId xmlns:p14="http://schemas.microsoft.com/office/powerpoint/2010/main" val="2268963273"/>
+      </p:ext>
+    </p:extLst>
+  </p:cSld>
+  <p:clrMapOvr>
+    <a:masterClrMapping/>
+  </p:clrMapOvr>
+</p:sld>
+</file>
+
+<file path=ppt/slides/slide3.xml><?xml version="1.0" encoding="utf-8"?>
+<p:sld xmlns:a="http://schemas.openxmlformats.org/drawingml/2006/main" xmlns:r="http://schemas.openxmlformats.org/officeDocument/2006/relationships" xmlns:p="http://schemas.openxmlformats.org/presentationml/2006/main">
+  <p:cSld>
+    <p:spTree>
+      <p:nvGrpSpPr>
+        <p:cNvPr id="1" name=""/>
+        <p:cNvGrpSpPr/>
+        <p:nvPr/>
+      </p:nvGrpSpPr>
+      <p:grpSpPr>
+        <a:xfrm>
+          <a:off x="0" y="0"/>
+          <a:ext cx="0" cy="0"/>
+          <a:chOff x="0" y="0"/>
+          <a:chExt cx="0" cy="0"/>
+        </a:xfrm>
+      </p:grpSpPr>
       <mc:AlternateContent xmlns:mc="http://schemas.openxmlformats.org/markup-compatibility/2006">
         <mc:Choice xmlns:a14="http://schemas.microsoft.com/office/drawing/2010/main" Requires="a14">
           <p:sp>
@@ -5050,7 +5704,7 @@
         <p:spPr>
           <a:xfrm>
             <a:off x="361395" y="6488668"/>
-            <a:ext cx="2395336" cy="300210"/>
+            <a:ext cx="7620000" cy="300210"/>
           </a:xfrm>
           <a:prstGeom prst="rect">
             <a:avLst/>
@@ -5065,47 +5719,11 @@
           <a:p>
             <a:r>
               <a:rPr lang="pt-BR" sz="1351" dirty="0"/>
-              <a:t>Professor: Marcos Goulart Lima</a:t>
+              <a:t>CEA055 - Estatística e Probabilidade - Professor: Marcos Goulart Lima</a:t>
             </a:r>
           </a:p>
         </p:txBody>
       </p:sp>
-      <p:pic>
-        <p:nvPicPr>
-          <p:cNvPr id="8" name="Espaço Reservado para Conteúdo 4">
-            <a:extLst>
-              <a:ext uri="{FF2B5EF4-FFF2-40B4-BE49-F238E27FC236}">
-                <a16:creationId xmlns:a16="http://schemas.microsoft.com/office/drawing/2014/main" id="{65AB402D-D1A8-4F31-BA42-34A6F0FC69F9}"/>
-              </a:ext>
-            </a:extLst>
-          </p:cNvPr>
-          <p:cNvPicPr>
-            <a:picLocks noChangeAspect="1"/>
-          </p:cNvPicPr>
-          <p:nvPr/>
-        </p:nvPicPr>
-        <p:blipFill>
-          <a:blip r:embed="rId3">
-            <a:extLst>
-              <a:ext uri="{28A0092B-C50C-407E-A947-70E740481C1C}">
-                <a14:useLocalDpi xmlns:a14="http://schemas.microsoft.com/office/drawing/2010/main" val="0"/>
-              </a:ext>
-            </a:extLst>
-          </a:blip>
-          <a:stretch>
-            <a:fillRect/>
-          </a:stretch>
-        </p:blipFill>
-        <p:spPr>
-          <a:xfrm>
-            <a:off x="62144" y="112237"/>
-            <a:ext cx="588096" cy="1228523"/>
-          </a:xfrm>
-          <a:prstGeom prst="rect">
-            <a:avLst/>
-          </a:prstGeom>
-        </p:spPr>
-      </p:pic>
     </p:spTree>
     <p:extLst>
       <p:ext uri="{BB962C8B-B14F-4D97-AF65-F5344CB8AC3E}">
@@ -5119,7 +5737,7 @@
 </p:sld>
 </file>
 
-<file path=ppt/slides/slide3.xml><?xml version="1.0" encoding="utf-8"?>
+<file path=ppt/slides/slide4.xml><?xml version="1.0" encoding="utf-8"?>
 <p:sld xmlns:a="http://schemas.openxmlformats.org/drawingml/2006/main" xmlns:r="http://schemas.openxmlformats.org/officeDocument/2006/relationships" xmlns:p="http://schemas.openxmlformats.org/presentationml/2006/main">
   <p:cSld>
     <p:spTree>
@@ -5136,56 +5754,6 @@
           <a:chExt cx="0" cy="0"/>
         </a:xfrm>
       </p:grpSpPr>
-      <p:sp>
-        <p:nvSpPr>
-          <p:cNvPr id="2" name="Título 1">
-            <a:extLst>
-              <a:ext uri="{FF2B5EF4-FFF2-40B4-BE49-F238E27FC236}">
-                <a16:creationId xmlns:a16="http://schemas.microsoft.com/office/drawing/2014/main" id="{BC798918-7CB4-450A-A042-F0B538CA25DE}"/>
-              </a:ext>
-            </a:extLst>
-          </p:cNvPr>
-          <p:cNvSpPr>
-            <a:spLocks noGrp="1"/>
-          </p:cNvSpPr>
-          <p:nvPr>
-            <p:ph type="title"/>
-          </p:nvPr>
-        </p:nvSpPr>
-        <p:spPr>
-          <a:xfrm>
-            <a:off x="1032611" y="0"/>
-            <a:ext cx="10827959" cy="1574800"/>
-          </a:xfrm>
-        </p:spPr>
-        <p:txBody>
-          <a:bodyPr>
-            <a:normAutofit/>
-          </a:bodyPr>
-          <a:lstStyle/>
-          <a:p>
-            <a:pPr algn="ctr"/>
-            <a:r>
-              <a:rPr lang="pt-BR" dirty="0">
-                <a:latin typeface="AlternateGothic2 BT" panose="020B0608020202050204" pitchFamily="34" charset="0"/>
-              </a:rPr>
-              <a:t>CEA055 – Estatística e Probabilidade</a:t>
-            </a:r>
-            <a:br>
-              <a:rPr lang="pt-BR" dirty="0">
-                <a:latin typeface="AlternateGothic2 BT" panose="020B0608020202050204" pitchFamily="34" charset="0"/>
-              </a:rPr>
-            </a:br>
-            <a:r>
-              <a:rPr lang="pt-BR" sz="2200" b="1" dirty="0"/>
-              <a:t>Estimação</a:t>
-            </a:r>
-            <a:endParaRPr lang="pt-BR" dirty="0">
-              <a:latin typeface="AlternateGothic2 BT" panose="020B0608020202050204" pitchFamily="34" charset="0"/>
-            </a:endParaRPr>
-          </a:p>
-        </p:txBody>
-      </p:sp>
       <mc:AlternateContent xmlns:mc="http://schemas.openxmlformats.org/markup-compatibility/2006">
         <mc:Choice xmlns:a14="http://schemas.microsoft.com/office/drawing/2010/main" Requires="a14">
           <p:sp>
@@ -5732,7 +6300,7 @@
         <p:spPr>
           <a:xfrm>
             <a:off x="361395" y="6488668"/>
-            <a:ext cx="2395336" cy="300210"/>
+            <a:ext cx="7620000" cy="300210"/>
           </a:xfrm>
           <a:prstGeom prst="rect">
             <a:avLst/>
@@ -5747,260 +6315,15 @@
           <a:p>
             <a:r>
               <a:rPr lang="pt-BR" sz="1351" dirty="0"/>
-              <a:t>Professor: Marcos Goulart Lima</a:t>
+              <a:t>CEA055 - Estatística e Probabilidade - Professor: Marcos Goulart Lima</a:t>
             </a:r>
           </a:p>
         </p:txBody>
       </p:sp>
-      <p:pic>
-        <p:nvPicPr>
-          <p:cNvPr id="8" name="Espaço Reservado para Conteúdo 4">
-            <a:extLst>
-              <a:ext uri="{FF2B5EF4-FFF2-40B4-BE49-F238E27FC236}">
-                <a16:creationId xmlns:a16="http://schemas.microsoft.com/office/drawing/2014/main" id="{65AB402D-D1A8-4F31-BA42-34A6F0FC69F9}"/>
-              </a:ext>
-            </a:extLst>
-          </p:cNvPr>
-          <p:cNvPicPr>
-            <a:picLocks noChangeAspect="1"/>
-          </p:cNvPicPr>
-          <p:nvPr/>
-        </p:nvPicPr>
-        <p:blipFill>
-          <a:blip r:embed="rId3">
-            <a:extLst>
-              <a:ext uri="{28A0092B-C50C-407E-A947-70E740481C1C}">
-                <a14:useLocalDpi xmlns:a14="http://schemas.microsoft.com/office/drawing/2010/main" val="0"/>
-              </a:ext>
-            </a:extLst>
-          </a:blip>
-          <a:stretch>
-            <a:fillRect/>
-          </a:stretch>
-        </p:blipFill>
-        <p:spPr>
-          <a:xfrm>
-            <a:off x="62144" y="112237"/>
-            <a:ext cx="588096" cy="1228523"/>
-          </a:xfrm>
-          <a:prstGeom prst="rect">
-            <a:avLst/>
-          </a:prstGeom>
-        </p:spPr>
-      </p:pic>
     </p:spTree>
     <p:extLst>
       <p:ext uri="{BB962C8B-B14F-4D97-AF65-F5344CB8AC3E}">
         <p14:creationId xmlns:p14="http://schemas.microsoft.com/office/powerpoint/2010/main" val="666514153"/>
-      </p:ext>
-    </p:extLst>
-  </p:cSld>
-  <p:clrMapOvr>
-    <a:masterClrMapping/>
-  </p:clrMapOvr>
-</p:sld>
-</file>
-
-<file path=ppt/slides/slide4.xml><?xml version="1.0" encoding="utf-8"?>
-<p:sld xmlns:a="http://schemas.openxmlformats.org/drawingml/2006/main" xmlns:r="http://schemas.openxmlformats.org/officeDocument/2006/relationships" xmlns:p="http://schemas.openxmlformats.org/presentationml/2006/main">
-  <p:cSld>
-    <p:spTree>
-      <p:nvGrpSpPr>
-        <p:cNvPr id="1" name=""/>
-        <p:cNvGrpSpPr/>
-        <p:nvPr/>
-      </p:nvGrpSpPr>
-      <p:grpSpPr>
-        <a:xfrm>
-          <a:off x="0" y="0"/>
-          <a:ext cx="0" cy="0"/>
-          <a:chOff x="0" y="0"/>
-          <a:chExt cx="0" cy="0"/>
-        </a:xfrm>
-      </p:grpSpPr>
-      <p:sp>
-        <p:nvSpPr>
-          <p:cNvPr id="2" name="Título 1">
-            <a:extLst>
-              <a:ext uri="{FF2B5EF4-FFF2-40B4-BE49-F238E27FC236}">
-                <a16:creationId xmlns:a16="http://schemas.microsoft.com/office/drawing/2014/main" id="{BC798918-7CB4-450A-A042-F0B538CA25DE}"/>
-              </a:ext>
-            </a:extLst>
-          </p:cNvPr>
-          <p:cNvSpPr>
-            <a:spLocks noGrp="1"/>
-          </p:cNvSpPr>
-          <p:nvPr>
-            <p:ph type="title"/>
-          </p:nvPr>
-        </p:nvSpPr>
-        <p:spPr>
-          <a:xfrm>
-            <a:off x="1032611" y="0"/>
-            <a:ext cx="10827959" cy="1574800"/>
-          </a:xfrm>
-        </p:spPr>
-        <p:txBody>
-          <a:bodyPr>
-            <a:normAutofit/>
-          </a:bodyPr>
-          <a:lstStyle/>
-          <a:p>
-            <a:pPr algn="ctr"/>
-            <a:r>
-              <a:rPr lang="pt-BR" dirty="0">
-                <a:latin typeface="AlternateGothic2 BT" panose="020B0608020202050204" pitchFamily="34" charset="0"/>
-              </a:rPr>
-              <a:t>CEA055 – Estatística e Probabilidade</a:t>
-            </a:r>
-            <a:br>
-              <a:rPr lang="pt-BR" dirty="0">
-                <a:latin typeface="AlternateGothic2 BT" panose="020B0608020202050204" pitchFamily="34" charset="0"/>
-              </a:rPr>
-            </a:br>
-            <a:r>
-              <a:rPr lang="pt-BR" sz="2200" b="1" dirty="0"/>
-              <a:t>Estimação</a:t>
-            </a:r>
-            <a:endParaRPr lang="pt-BR" dirty="0">
-              <a:latin typeface="AlternateGothic2 BT" panose="020B0608020202050204" pitchFamily="34" charset="0"/>
-            </a:endParaRPr>
-          </a:p>
-        </p:txBody>
-      </p:sp>
-      <p:sp>
-        <p:nvSpPr>
-          <p:cNvPr id="6" name="CaixaDeTexto 5">
-            <a:extLst>
-              <a:ext uri="{FF2B5EF4-FFF2-40B4-BE49-F238E27FC236}">
-                <a16:creationId xmlns:a16="http://schemas.microsoft.com/office/drawing/2014/main" id="{720B10DA-C761-4DEE-8D86-E170E1C2E981}"/>
-              </a:ext>
-            </a:extLst>
-          </p:cNvPr>
-          <p:cNvSpPr txBox="1"/>
-          <p:nvPr/>
-        </p:nvSpPr>
-        <p:spPr>
-          <a:xfrm>
-            <a:off x="881687" y="1506234"/>
-            <a:ext cx="10618651" cy="2246769"/>
-          </a:xfrm>
-          <a:prstGeom prst="rect">
-            <a:avLst/>
-          </a:prstGeom>
-          <a:noFill/>
-        </p:spPr>
-        <p:txBody>
-          <a:bodyPr wrap="square" rtlCol="0">
-            <a:spAutoFit/>
-          </a:bodyPr>
-          <a:lstStyle/>
-          <a:p>
-            <a:r>
-              <a:rPr lang="pt-BR" sz="2800" b="1" dirty="0"/>
-              <a:t>Tipos de estimação</a:t>
-            </a:r>
-          </a:p>
-          <a:p>
-            <a:endParaRPr lang="pt-BR" sz="2800" dirty="0"/>
-          </a:p>
-          <a:p>
-            <a:pPr marL="457200" indent="-457200">
-              <a:buFont typeface="Arial" panose="020B0604020202020204" pitchFamily="34" charset="0"/>
-              <a:buChar char="•"/>
-            </a:pPr>
-            <a:r>
-              <a:rPr lang="pt-BR" sz="2800" dirty="0"/>
-              <a:t>Por ponto (aproximação do parâmetro)</a:t>
-            </a:r>
-          </a:p>
-          <a:p>
-            <a:pPr marL="457200" indent="-457200">
-              <a:buFont typeface="Arial" panose="020B0604020202020204" pitchFamily="34" charset="0"/>
-              <a:buChar char="•"/>
-            </a:pPr>
-            <a:r>
-              <a:rPr lang="pt-BR" sz="2800" dirty="0"/>
-              <a:t>Por intervalo (aproximação que contém uma medida do possível erro).</a:t>
-            </a:r>
-          </a:p>
-        </p:txBody>
-      </p:sp>
-      <p:sp>
-        <p:nvSpPr>
-          <p:cNvPr id="3" name="CaixaDeTexto 2">
-            <a:extLst>
-              <a:ext uri="{FF2B5EF4-FFF2-40B4-BE49-F238E27FC236}">
-                <a16:creationId xmlns:a16="http://schemas.microsoft.com/office/drawing/2014/main" id="{19131A04-B5D6-4211-8B49-4615DE5797E9}"/>
-              </a:ext>
-            </a:extLst>
-          </p:cNvPr>
-          <p:cNvSpPr txBox="1"/>
-          <p:nvPr/>
-        </p:nvSpPr>
-        <p:spPr>
-          <a:xfrm>
-            <a:off x="361395" y="6488668"/>
-            <a:ext cx="2395336" cy="300210"/>
-          </a:xfrm>
-          <a:prstGeom prst="rect">
-            <a:avLst/>
-          </a:prstGeom>
-          <a:noFill/>
-        </p:spPr>
-        <p:txBody>
-          <a:bodyPr wrap="none" rtlCol="0">
-            <a:spAutoFit/>
-          </a:bodyPr>
-          <a:lstStyle/>
-          <a:p>
-            <a:r>
-              <a:rPr lang="pt-BR" sz="1351" dirty="0"/>
-              <a:t>Professor: Marcos Goulart Lima</a:t>
-            </a:r>
-          </a:p>
-        </p:txBody>
-      </p:sp>
-      <p:pic>
-        <p:nvPicPr>
-          <p:cNvPr id="8" name="Espaço Reservado para Conteúdo 4">
-            <a:extLst>
-              <a:ext uri="{FF2B5EF4-FFF2-40B4-BE49-F238E27FC236}">
-                <a16:creationId xmlns:a16="http://schemas.microsoft.com/office/drawing/2014/main" id="{65AB402D-D1A8-4F31-BA42-34A6F0FC69F9}"/>
-              </a:ext>
-            </a:extLst>
-          </p:cNvPr>
-          <p:cNvPicPr>
-            <a:picLocks noChangeAspect="1"/>
-          </p:cNvPicPr>
-          <p:nvPr/>
-        </p:nvPicPr>
-        <p:blipFill>
-          <a:blip r:embed="rId2">
-            <a:extLst>
-              <a:ext uri="{28A0092B-C50C-407E-A947-70E740481C1C}">
-                <a14:useLocalDpi xmlns:a14="http://schemas.microsoft.com/office/drawing/2010/main" val="0"/>
-              </a:ext>
-            </a:extLst>
-          </a:blip>
-          <a:stretch>
-            <a:fillRect/>
-          </a:stretch>
-        </p:blipFill>
-        <p:spPr>
-          <a:xfrm>
-            <a:off x="62144" y="112237"/>
-            <a:ext cx="588096" cy="1228523"/>
-          </a:xfrm>
-          <a:prstGeom prst="rect">
-            <a:avLst/>
-          </a:prstGeom>
-        </p:spPr>
-      </p:pic>
-    </p:spTree>
-    <p:extLst>
-      <p:ext uri="{BB962C8B-B14F-4D97-AF65-F5344CB8AC3E}">
-        <p14:creationId xmlns:p14="http://schemas.microsoft.com/office/powerpoint/2010/main" val="2714012940"/>
       </p:ext>
     </p:extLst>
   </p:cSld>
@@ -6029,54 +6352,127 @@
       </p:grpSpPr>
       <p:sp>
         <p:nvSpPr>
-          <p:cNvPr id="2" name="Título 1">
+          <p:cNvPr id="6" name="CaixaDeTexto 5">
             <a:extLst>
               <a:ext uri="{FF2B5EF4-FFF2-40B4-BE49-F238E27FC236}">
-                <a16:creationId xmlns:a16="http://schemas.microsoft.com/office/drawing/2014/main" id="{BC798918-7CB4-450A-A042-F0B538CA25DE}"/>
+                <a16:creationId xmlns:a16="http://schemas.microsoft.com/office/drawing/2014/main" id="{720B10DA-C761-4DEE-8D86-E170E1C2E981}"/>
               </a:ext>
             </a:extLst>
           </p:cNvPr>
-          <p:cNvSpPr>
-            <a:spLocks noGrp="1"/>
-          </p:cNvSpPr>
-          <p:nvPr>
-            <p:ph type="title"/>
-          </p:nvPr>
+          <p:cNvSpPr txBox="1"/>
+          <p:nvPr/>
         </p:nvSpPr>
         <p:spPr>
           <a:xfrm>
-            <a:off x="1032611" y="0"/>
-            <a:ext cx="10827959" cy="1574800"/>
+            <a:off x="881687" y="1506234"/>
+            <a:ext cx="10618651" cy="2246769"/>
           </a:xfrm>
+          <a:prstGeom prst="rect">
+            <a:avLst/>
+          </a:prstGeom>
+          <a:noFill/>
         </p:spPr>
         <p:txBody>
-          <a:bodyPr>
-            <a:normAutofit/>
+          <a:bodyPr wrap="square" rtlCol="0">
+            <a:spAutoFit/>
           </a:bodyPr>
           <a:lstStyle/>
           <a:p>
-            <a:pPr algn="ctr"/>
-            <a:r>
-              <a:rPr lang="pt-BR" dirty="0">
-                <a:latin typeface="AlternateGothic2 BT" panose="020B0608020202050204" pitchFamily="34" charset="0"/>
-              </a:rPr>
-              <a:t>CEA055 – Estatística e Probabilidade</a:t>
-            </a:r>
-            <a:br>
-              <a:rPr lang="pt-BR" dirty="0">
-                <a:latin typeface="AlternateGothic2 BT" panose="020B0608020202050204" pitchFamily="34" charset="0"/>
-              </a:rPr>
-            </a:br>
-            <a:r>
-              <a:rPr lang="pt-BR" sz="2200" b="1" dirty="0"/>
-              <a:t>Estimação</a:t>
-            </a:r>
-            <a:endParaRPr lang="pt-BR" dirty="0">
-              <a:latin typeface="AlternateGothic2 BT" panose="020B0608020202050204" pitchFamily="34" charset="0"/>
-            </a:endParaRPr>
+            <a:r>
+              <a:rPr lang="pt-BR" sz="2800" b="1" dirty="0"/>
+              <a:t>Tipos de estimação</a:t>
+            </a:r>
+          </a:p>
+          <a:p>
+            <a:endParaRPr lang="pt-BR" sz="2800" dirty="0"/>
+          </a:p>
+          <a:p>
+            <a:pPr marL="457200" indent="-457200">
+              <a:buFont typeface="Arial" panose="020B0604020202020204" pitchFamily="34" charset="0"/>
+              <a:buChar char="•"/>
+            </a:pPr>
+            <a:r>
+              <a:rPr lang="pt-BR" sz="2800" dirty="0"/>
+              <a:t>Por ponto (aproximação do parâmetro)</a:t>
+            </a:r>
+          </a:p>
+          <a:p>
+            <a:pPr marL="457200" indent="-457200">
+              <a:buFont typeface="Arial" panose="020B0604020202020204" pitchFamily="34" charset="0"/>
+              <a:buChar char="•"/>
+            </a:pPr>
+            <a:r>
+              <a:rPr lang="pt-BR" sz="2800" dirty="0"/>
+              <a:t>Por intervalo (aproximação que contém uma medida do possível erro).</a:t>
+            </a:r>
           </a:p>
         </p:txBody>
       </p:sp>
+      <p:sp>
+        <p:nvSpPr>
+          <p:cNvPr id="3" name="CaixaDeTexto 2">
+            <a:extLst>
+              <a:ext uri="{FF2B5EF4-FFF2-40B4-BE49-F238E27FC236}">
+                <a16:creationId xmlns:a16="http://schemas.microsoft.com/office/drawing/2014/main" id="{19131A04-B5D6-4211-8B49-4615DE5797E9}"/>
+              </a:ext>
+            </a:extLst>
+          </p:cNvPr>
+          <p:cNvSpPr txBox="1"/>
+          <p:nvPr/>
+        </p:nvSpPr>
+        <p:spPr>
+          <a:xfrm>
+            <a:off x="361395" y="6488668"/>
+            <a:ext cx="7620000" cy="300210"/>
+          </a:xfrm>
+          <a:prstGeom prst="rect">
+            <a:avLst/>
+          </a:prstGeom>
+          <a:noFill/>
+        </p:spPr>
+        <p:txBody>
+          <a:bodyPr wrap="none" rtlCol="0">
+            <a:spAutoFit/>
+          </a:bodyPr>
+          <a:lstStyle/>
+          <a:p>
+            <a:r>
+              <a:rPr lang="pt-BR" sz="1351" dirty="0"/>
+              <a:t>CEA055 - Estatística e Probabilidade - Professor: Marcos Goulart Lima</a:t>
+            </a:r>
+          </a:p>
+        </p:txBody>
+      </p:sp>
+    </p:spTree>
+    <p:extLst>
+      <p:ext uri="{BB962C8B-B14F-4D97-AF65-F5344CB8AC3E}">
+        <p14:creationId xmlns:p14="http://schemas.microsoft.com/office/powerpoint/2010/main" val="2714012940"/>
+      </p:ext>
+    </p:extLst>
+  </p:cSld>
+  <p:clrMapOvr>
+    <a:masterClrMapping/>
+  </p:clrMapOvr>
+</p:sld>
+</file>
+
+<file path=ppt/slides/slide6.xml><?xml version="1.0" encoding="utf-8"?>
+<p:sld xmlns:a="http://schemas.openxmlformats.org/drawingml/2006/main" xmlns:r="http://schemas.openxmlformats.org/officeDocument/2006/relationships" xmlns:p="http://schemas.openxmlformats.org/presentationml/2006/main">
+  <p:cSld>
+    <p:spTree>
+      <p:nvGrpSpPr>
+        <p:cNvPr id="1" name=""/>
+        <p:cNvGrpSpPr/>
+        <p:nvPr/>
+      </p:nvGrpSpPr>
+      <p:grpSpPr>
+        <a:xfrm>
+          <a:off x="0" y="0"/>
+          <a:ext cx="0" cy="0"/>
+          <a:chOff x="0" y="0"/>
+          <a:chExt cx="0" cy="0"/>
+        </a:xfrm>
+      </p:grpSpPr>
       <mc:AlternateContent xmlns:mc="http://schemas.openxmlformats.org/markup-compatibility/2006">
         <mc:Choice xmlns:a14="http://schemas.microsoft.com/office/drawing/2010/main" Requires="a14">
           <p:sp>
@@ -6577,7 +6973,7 @@
         <p:spPr>
           <a:xfrm>
             <a:off x="361395" y="6488668"/>
-            <a:ext cx="2395336" cy="300210"/>
+            <a:ext cx="7620000" cy="300210"/>
           </a:xfrm>
           <a:prstGeom prst="rect">
             <a:avLst/>
@@ -6592,47 +6988,11 @@
           <a:p>
             <a:r>
               <a:rPr lang="pt-BR" sz="1351" dirty="0"/>
-              <a:t>Professor: Marcos Goulart Lima</a:t>
+              <a:t>CEA055 - Estatística e Probabilidade - Professor: Marcos Goulart Lima</a:t>
             </a:r>
           </a:p>
         </p:txBody>
       </p:sp>
-      <p:pic>
-        <p:nvPicPr>
-          <p:cNvPr id="8" name="Espaço Reservado para Conteúdo 4">
-            <a:extLst>
-              <a:ext uri="{FF2B5EF4-FFF2-40B4-BE49-F238E27FC236}">
-                <a16:creationId xmlns:a16="http://schemas.microsoft.com/office/drawing/2014/main" id="{65AB402D-D1A8-4F31-BA42-34A6F0FC69F9}"/>
-              </a:ext>
-            </a:extLst>
-          </p:cNvPr>
-          <p:cNvPicPr>
-            <a:picLocks noChangeAspect="1"/>
-          </p:cNvPicPr>
-          <p:nvPr/>
-        </p:nvPicPr>
-        <p:blipFill>
-          <a:blip r:embed="rId3">
-            <a:extLst>
-              <a:ext uri="{28A0092B-C50C-407E-A947-70E740481C1C}">
-                <a14:useLocalDpi xmlns:a14="http://schemas.microsoft.com/office/drawing/2010/main" val="0"/>
-              </a:ext>
-            </a:extLst>
-          </a:blip>
-          <a:stretch>
-            <a:fillRect/>
-          </a:stretch>
-        </p:blipFill>
-        <p:spPr>
-          <a:xfrm>
-            <a:off x="62144" y="112237"/>
-            <a:ext cx="588096" cy="1228523"/>
-          </a:xfrm>
-          <a:prstGeom prst="rect">
-            <a:avLst/>
-          </a:prstGeom>
-        </p:spPr>
-      </p:pic>
     </p:spTree>
     <p:extLst>
       <p:ext uri="{BB962C8B-B14F-4D97-AF65-F5344CB8AC3E}">
@@ -6646,7 +7006,7 @@
 </p:sld>
 </file>
 
-<file path=ppt/slides/slide51.xml><?xml version="1.0" encoding="utf-8"?>
+<file path=ppt/slides/slide7.xml><?xml version="1.0" encoding="utf-8"?>
 <p:sld xmlns:a="http://schemas.openxmlformats.org/drawingml/2006/main" xmlns:r="http://schemas.openxmlformats.org/officeDocument/2006/relationships" xmlns:p="http://schemas.openxmlformats.org/presentationml/2006/main">
   <p:cSld>
     <p:spTree>
@@ -6663,588 +7023,6 @@
           <a:chExt cx="0" cy="0"/>
         </a:xfrm>
       </p:grpSpPr>
-      <p:sp>
-        <p:nvSpPr>
-          <p:cNvPr id="2" name="Título 1">
-            <a:extLst>
-              <a:ext uri="{FF2B5EF4-FFF2-40B4-BE49-F238E27FC236}">
-                <a16:creationId xmlns:a16="http://schemas.microsoft.com/office/drawing/2014/main" id="{BC798918-7CB4-450A-A042-F0B538CA25DE}"/>
-              </a:ext>
-            </a:extLst>
-          </p:cNvPr>
-          <p:cNvSpPr>
-            <a:spLocks noGrp="1"/>
-          </p:cNvSpPr>
-          <p:nvPr>
-            <p:ph type="title"/>
-          </p:nvPr>
-        </p:nvSpPr>
-        <p:spPr>
-          <a:xfrm>
-            <a:off x="1032611" y="0"/>
-            <a:ext cx="10827959" cy="1574800"/>
-          </a:xfrm>
-        </p:spPr>
-        <p:txBody>
-          <a:bodyPr>
-            <a:normAutofit/>
-          </a:bodyPr>
-          <a:lstStyle/>
-          <a:p>
-            <a:pPr algn="ctr"/>
-            <a:r>
-              <a:rPr lang="pt-BR" dirty="0">
-                <a:latin typeface="AlternateGothic2 BT" panose="020B0608020202050204" pitchFamily="34" charset="0"/>
-              </a:rPr>
-              <a:t>CEA055 – Estatística e Probabilidade</a:t>
-            </a:r>
-            <a:br>
-              <a:rPr lang="pt-BR" dirty="0">
-                <a:latin typeface="AlternateGothic2 BT" panose="020B0608020202050204" pitchFamily="34" charset="0"/>
-              </a:rPr>
-            </a:br>
-            <a:r>
-              <a:rPr lang="pt-BR" sz="2200" b="1" dirty="0"/>
-              <a:t>Teorema do Limite Central e Estimação Pontual</a:t>
-            </a:r>
-            <a:endParaRPr lang="pt-BR" dirty="0">
-              <a:latin typeface="AlternateGothic2 BT" panose="020B0608020202050204" pitchFamily="34" charset="0"/>
-            </a:endParaRPr>
-          </a:p>
-        </p:txBody>
-      </p:sp>
-      <p:sp>
-        <p:nvSpPr>
-          <p:cNvPr id="6" name="CaixaDeTexto 5">
-            <a:extLst>
-              <a:ext uri="{FF2B5EF4-FFF2-40B4-BE49-F238E27FC236}">
-                <a16:creationId xmlns:a16="http://schemas.microsoft.com/office/drawing/2014/main" id="{720B10DA-C761-4DEE-8D86-E170E1C2E981}"/>
-              </a:ext>
-            </a:extLst>
-          </p:cNvPr>
-          <p:cNvSpPr txBox="1"/>
-          <p:nvPr/>
-        </p:nvSpPr>
-        <p:spPr>
-          <a:xfrm>
-            <a:off x="881687" y="1441868"/>
-            <a:ext cx="10067277" cy="4295185"/>
-          </a:xfrm>
-          <a:prstGeom prst="rect">
-            <a:avLst/>
-          </a:prstGeom>
-          <a:noFill/>
-        </p:spPr>
-        <p:txBody>
-          <a:bodyPr wrap="square" rtlCol="0">
-            <a:spAutoFit/>
-          </a:bodyPr>
-          <a:lstStyle/>
-          <a:p>
-            <a:r>
-              <a:rPr lang="pt-BR" sz="2400" b="1" dirty="0"/>
-              <a:t>Objetivos do aula:</a:t>
-            </a:r>
-          </a:p>
-          <a:p>
-            <a:pPr marL="285737" indent="-285737">
-              <a:buFont typeface="Arial" panose="020B0604020202020204" pitchFamily="34" charset="0"/>
-              <a:buChar char="•"/>
-            </a:pPr>
-            <a:r>
-              <a:rPr lang="pt-BR" sz="2400" dirty="0"/>
-              <a:t>Compreender o Teorema do Limite Central e sua importância na inferência.</a:t>
-            </a:r>
-          </a:p>
-          <a:p>
-            <a:pPr marL="285737" indent="-285737">
-              <a:buFont typeface="Arial" panose="020B0604020202020204" pitchFamily="34" charset="0"/>
-              <a:buChar char="•"/>
-            </a:pPr>
-            <a:r>
-              <a:rPr lang="pt-BR" sz="2400" dirty="0"/>
-              <a:t>Obter estimadores pontuais para a média e a proporção populacionais.</a:t>
-            </a:r>
-          </a:p>
-          <a:p>
-            <a:r>
-              <a:rPr lang="pt-BR" sz="2400" b="1" dirty="0"/>
-              <a:t xml:space="preserve">Referências: </a:t>
-            </a:r>
-          </a:p>
-          <a:p>
-            <a:pPr marL="457178" indent="-457178">
-              <a:buFont typeface="Arial" panose="020B0604020202020204" pitchFamily="34" charset="0"/>
-              <a:buChar char="•"/>
-            </a:pPr>
-            <a:r>
-              <a:rPr lang="pt-BR" sz="2000" dirty="0"/>
-              <a:t xml:space="preserve">Bussab, Morettin. </a:t>
-            </a:r>
-            <a:r>
-              <a:rPr lang="pt-BR" sz="2000" b="1" dirty="0"/>
-              <a:t>Estatística Básica</a:t>
-            </a:r>
-            <a:r>
-              <a:rPr lang="pt-BR" sz="2000" dirty="0"/>
-              <a:t>, 9ed — Cap. 10 (10.7); Cap. 11 (11.1)</a:t>
-            </a:r>
-          </a:p>
-          <a:p>
-            <a:pPr marL="457178" indent="-457178">
-              <a:buFont typeface="Arial" panose="020B0604020202020204" pitchFamily="34" charset="0"/>
-              <a:buChar char="•"/>
-            </a:pPr>
-            <a:r>
-              <a:rPr lang="pt-BR" sz="2000" dirty="0"/>
-              <a:t xml:space="preserve">Montgomery, Runger. </a:t>
-            </a:r>
-            <a:r>
-              <a:rPr lang="pt-BR" sz="2000" b="1" dirty="0"/>
-              <a:t>Applied Statistics and Probability for Engineers</a:t>
-            </a:r>
-            <a:r>
-              <a:rPr lang="pt-BR" sz="2000" dirty="0"/>
-              <a:t>, 7th ed — Cap. 7 (7.2, 7.3)</a:t>
-            </a:r>
-          </a:p>
-          <a:p>
-            <a:pPr marL="457178" indent="-457178">
-              <a:buFont typeface="Arial" panose="020B0604020202020204" pitchFamily="34" charset="0"/>
-              <a:buChar char="•"/>
-            </a:pPr>
-            <a:r>
-              <a:rPr lang="pt-BR" sz="2000" dirty="0"/>
-              <a:t xml:space="preserve">Magalhães, Lima. </a:t>
-            </a:r>
-            <a:r>
-              <a:rPr lang="pt-BR" sz="2000" b="1" dirty="0"/>
-              <a:t>Noções de Probabilidade e Estatística</a:t>
-            </a:r>
-            <a:r>
-              <a:rPr lang="pt-BR" sz="2000" dirty="0"/>
-              <a:t>, 5ed — Cap. 7 (7.3)</a:t>
-            </a:r>
-          </a:p>
-          <a:p>
-            <a:pPr marL="457178" indent="-457178">
-              <a:buFont typeface="Arial" panose="020B0604020202020204" pitchFamily="34" charset="0"/>
-              <a:buChar char="•"/>
-            </a:pPr>
-            <a:r>
-              <a:rPr lang="pt-BR" sz="2000" dirty="0"/>
-              <a:t xml:space="preserve">Morettin. </a:t>
-            </a:r>
-            <a:r>
-              <a:rPr lang="pt-BR" sz="2000" b="1" dirty="0"/>
-              <a:t>Estatística Básica: Probabilidade e Inferência</a:t>
-            </a:r>
-            <a:r>
-              <a:rPr lang="pt-BR" sz="2000" dirty="0"/>
-              <a:t xml:space="preserve"> — Cap. 9 (9.1); Cap. 10 (10.2, 10.3)</a:t>
-            </a:r>
-          </a:p>
-        </p:txBody>
-      </p:sp>
-      <p:sp>
-        <p:nvSpPr>
-          <p:cNvPr id="3" name="CaixaDeTexto 2">
-            <a:extLst>
-              <a:ext uri="{FF2B5EF4-FFF2-40B4-BE49-F238E27FC236}">
-                <a16:creationId xmlns:a16="http://schemas.microsoft.com/office/drawing/2014/main" id="{19131A04-B5D6-4211-8B49-4615DE5797E9}"/>
-              </a:ext>
-            </a:extLst>
-          </p:cNvPr>
-          <p:cNvSpPr txBox="1"/>
-          <p:nvPr/>
-        </p:nvSpPr>
-        <p:spPr>
-          <a:xfrm>
-            <a:off x="361395" y="6488668"/>
-            <a:ext cx="2395336" cy="300210"/>
-          </a:xfrm>
-          <a:prstGeom prst="rect">
-            <a:avLst/>
-          </a:prstGeom>
-          <a:noFill/>
-        </p:spPr>
-        <p:txBody>
-          <a:bodyPr wrap="none" rtlCol="0">
-            <a:spAutoFit/>
-          </a:bodyPr>
-          <a:lstStyle/>
-          <a:p>
-            <a:r>
-              <a:rPr lang="pt-BR" sz="1351" dirty="0"/>
-              <a:t>Professor: Marcos Goulart Lima</a:t>
-            </a:r>
-          </a:p>
-        </p:txBody>
-      </p:sp>
-      <p:pic>
-        <p:nvPicPr>
-          <p:cNvPr id="8" name="Espaço Reservado para Conteúdo 4">
-            <a:extLst>
-              <a:ext uri="{FF2B5EF4-FFF2-40B4-BE49-F238E27FC236}">
-                <a16:creationId xmlns:a16="http://schemas.microsoft.com/office/drawing/2014/main" id="{65AB402D-D1A8-4F31-BA42-34A6F0FC69F9}"/>
-              </a:ext>
-            </a:extLst>
-          </p:cNvPr>
-          <p:cNvPicPr>
-            <a:picLocks noChangeAspect="1"/>
-          </p:cNvPicPr>
-          <p:nvPr/>
-        </p:nvPicPr>
-        <p:blipFill>
-          <a:blip r:embed="rId2">
-            <a:extLst>
-              <a:ext uri="{28A0092B-C50C-407E-A947-70E740481C1C}">
-                <a14:useLocalDpi xmlns:a14="http://schemas.microsoft.com/office/drawing/2010/main" val="0"/>
-              </a:ext>
-            </a:extLst>
-          </a:blip>
-          <a:stretch>
-            <a:fillRect/>
-          </a:stretch>
-        </p:blipFill>
-        <p:spPr>
-          <a:xfrm>
-            <a:off x="62144" y="112237"/>
-            <a:ext cx="588096" cy="1228523"/>
-          </a:xfrm>
-          <a:prstGeom prst="rect">
-            <a:avLst/>
-          </a:prstGeom>
-        </p:spPr>
-      </p:pic>
-    </p:spTree>
-    <p:extLst>
-      <p:ext uri="{BB962C8B-B14F-4D97-AF65-F5344CB8AC3E}">
-        <p14:creationId xmlns:p14="http://schemas.microsoft.com/office/powerpoint/2010/main" val="1670738953"/>
-      </p:ext>
-    </p:extLst>
-  </p:cSld>
-  <p:clrMapOvr>
-    <a:masterClrMapping/>
-  </p:clrMapOvr>
-</p:sld>
-</file>
-
-<file path=ppt/slides/slide52.xml><?xml version="1.0" encoding="utf-8"?>
-<p:sld xmlns:a="http://schemas.openxmlformats.org/drawingml/2006/main" xmlns:r="http://schemas.openxmlformats.org/officeDocument/2006/relationships" xmlns:p="http://schemas.openxmlformats.org/presentationml/2006/main">
-  <p:cSld>
-    <p:spTree>
-      <p:nvGrpSpPr>
-        <p:cNvPr id="1" name=""/>
-        <p:cNvGrpSpPr/>
-        <p:nvPr/>
-      </p:nvGrpSpPr>
-      <p:grpSpPr>
-        <a:xfrm>
-          <a:off x="0" y="0"/>
-          <a:ext cx="0" cy="0"/>
-          <a:chOff x="0" y="0"/>
-          <a:chExt cx="0" cy="0"/>
-        </a:xfrm>
-      </p:grpSpPr>
-      <p:sp>
-        <p:nvSpPr>
-          <p:cNvPr id="2" name="Título 1">
-            <a:extLst>
-              <a:ext uri="{FF2B5EF4-FFF2-40B4-BE49-F238E27FC236}">
-                <a16:creationId xmlns:a16="http://schemas.microsoft.com/office/drawing/2014/main" id="{BC798918-7CB4-450A-A042-F0B538CA25DE}"/>
-              </a:ext>
-            </a:extLst>
-          </p:cNvPr>
-          <p:cNvSpPr>
-            <a:spLocks noGrp="1"/>
-          </p:cNvSpPr>
-          <p:nvPr>
-            <p:ph type="title"/>
-          </p:nvPr>
-        </p:nvSpPr>
-        <p:spPr>
-          <a:xfrm>
-            <a:off x="1032611" y="0"/>
-            <a:ext cx="10827959" cy="1574800"/>
-          </a:xfrm>
-        </p:spPr>
-        <p:txBody>
-          <a:bodyPr>
-            <a:normAutofit/>
-          </a:bodyPr>
-          <a:lstStyle/>
-          <a:p>
-            <a:pPr algn="ctr"/>
-            <a:r>
-              <a:rPr lang="pt-BR" dirty="0">
-                <a:latin typeface="AlternateGothic2 BT" panose="020B0608020202050204" pitchFamily="34" charset="0"/>
-              </a:rPr>
-              <a:t>CEA055 – Estatística e Probabilidade</a:t>
-            </a:r>
-            <a:br>
-              <a:rPr lang="pt-BR" dirty="0">
-                <a:latin typeface="AlternateGothic2 BT" panose="020B0608020202050204" pitchFamily="34" charset="0"/>
-              </a:rPr>
-            </a:br>
-            <a:r>
-              <a:rPr lang="pt-BR" sz="2200" b="1" dirty="0"/>
-              <a:t>TLC e Estimação Pontual — Atividades</a:t>
-            </a:r>
-            <a:endParaRPr lang="pt-BR" dirty="0">
-              <a:latin typeface="AlternateGothic2 BT" panose="020B0608020202050204" pitchFamily="34" charset="0"/>
-            </a:endParaRPr>
-          </a:p>
-        </p:txBody>
-      </p:sp>
-      <p:sp>
-        <p:nvSpPr>
-          <p:cNvPr id="6" name="CaixaDeTexto 5">
-            <a:extLst>
-              <a:ext uri="{FF2B5EF4-FFF2-40B4-BE49-F238E27FC236}">
-                <a16:creationId xmlns:a16="http://schemas.microsoft.com/office/drawing/2014/main" id="{720B10DA-C761-4DEE-8D86-E170E1C2E981}"/>
-              </a:ext>
-            </a:extLst>
-          </p:cNvPr>
-          <p:cNvSpPr txBox="1"/>
-          <p:nvPr/>
-        </p:nvSpPr>
-        <p:spPr>
-          <a:xfrm>
-            <a:off x="881687" y="1441868"/>
-            <a:ext cx="10067277" cy="4295185"/>
-          </a:xfrm>
-          <a:prstGeom prst="rect">
-            <a:avLst/>
-          </a:prstGeom>
-          <a:noFill/>
-        </p:spPr>
-        <p:txBody>
-          <a:bodyPr wrap="square" rtlCol="0">
-            <a:spAutoFit/>
-          </a:bodyPr>
-          <a:lstStyle/>
-          <a:p>
-            <a:r>
-              <a:rPr lang="pt-BR" sz="2400" b="1" dirty="0"/>
-              <a:t>Atividades referentes à aula</a:t>
-            </a:r>
-          </a:p>
-          <a:p>
-            <a:r>
-              <a:rPr lang="pt-BR" sz="2000" dirty="0"/>
-              <a:t xml:space="preserve">Leitura recomendada: </a:t>
-            </a:r>
-          </a:p>
-          <a:p>
-            <a:pPr marL="457178" indent="-457178">
-              <a:buFont typeface="Arial" panose="020B0604020202020204" pitchFamily="34" charset="0"/>
-              <a:buChar char="•"/>
-            </a:pPr>
-            <a:r>
-              <a:rPr lang="pt-BR" sz="2000" dirty="0"/>
-              <a:t>Bussab &amp; Morettin — Cap. 10: 10.7; Cap. 11: 11.1</a:t>
-            </a:r>
-          </a:p>
-          <a:p>
-            <a:pPr marL="457178" indent="-457178">
-              <a:buFont typeface="Arial" panose="020B0604020202020204" pitchFamily="34" charset="0"/>
-              <a:buChar char="•"/>
-            </a:pPr>
-            <a:r>
-              <a:rPr lang="pt-BR" sz="2000" dirty="0"/>
-              <a:t>Montgomery &amp; Runger — Cap. 7: 7.2, 7.3</a:t>
-            </a:r>
-          </a:p>
-          <a:p>
-            <a:pPr marL="457178" indent="-457178">
-              <a:buFont typeface="Arial" panose="020B0604020202020204" pitchFamily="34" charset="0"/>
-              <a:buChar char="•"/>
-            </a:pPr>
-            <a:r>
-              <a:rPr lang="pt-BR" sz="2000" dirty="0"/>
-              <a:t>Magalhães &amp; Lima — Cap. 7: 7.3</a:t>
-            </a:r>
-          </a:p>
-          <a:p>
-            <a:pPr marL="457178" indent="-457178">
-              <a:buFont typeface="Arial" panose="020B0604020202020204" pitchFamily="34" charset="0"/>
-              <a:buChar char="•"/>
-            </a:pPr>
-            <a:r>
-              <a:rPr lang="pt-BR" sz="2000" dirty="0"/>
-              <a:t>Morettin — Cap. 9: 9.1; Cap. 10: 10.2, 10.3</a:t>
-            </a:r>
-          </a:p>
-          <a:p>
-            <a:r>
-              <a:rPr lang="pt-BR" sz="2000" dirty="0"/>
-              <a:t>Exercícios recomendados:</a:t>
-            </a:r>
-          </a:p>
-          <a:p>
-            <a:pPr marL="457178" indent="-457178">
-              <a:buFont typeface="Arial" panose="020B0604020202020204" pitchFamily="34" charset="0"/>
-              <a:buChar char="•"/>
-            </a:pPr>
-            <a:r>
-              <a:rPr lang="pt-BR" sz="2000" dirty="0"/>
-              <a:t>Bussab, Cap. 10 e 11: exercícios sobre distribuição amostral e estimação pontual</a:t>
-            </a:r>
-          </a:p>
-        </p:txBody>
-      </p:sp>
-      <p:sp>
-        <p:nvSpPr>
-          <p:cNvPr id="3" name="CaixaDeTexto 2">
-            <a:extLst>
-              <a:ext uri="{FF2B5EF4-FFF2-40B4-BE49-F238E27FC236}">
-                <a16:creationId xmlns:a16="http://schemas.microsoft.com/office/drawing/2014/main" id="{19131A04-B5D6-4211-8B49-4615DE5797E9}"/>
-              </a:ext>
-            </a:extLst>
-          </p:cNvPr>
-          <p:cNvSpPr txBox="1"/>
-          <p:nvPr/>
-        </p:nvSpPr>
-        <p:spPr>
-          <a:xfrm>
-            <a:off x="361395" y="6488668"/>
-            <a:ext cx="2395336" cy="300210"/>
-          </a:xfrm>
-          <a:prstGeom prst="rect">
-            <a:avLst/>
-          </a:prstGeom>
-          <a:noFill/>
-        </p:spPr>
-        <p:txBody>
-          <a:bodyPr wrap="none" rtlCol="0">
-            <a:spAutoFit/>
-          </a:bodyPr>
-          <a:lstStyle/>
-          <a:p>
-            <a:r>
-              <a:rPr lang="pt-BR" sz="1351" dirty="0"/>
-              <a:t>Professor: Marcos Goulart Lima</a:t>
-            </a:r>
-          </a:p>
-        </p:txBody>
-      </p:sp>
-      <p:pic>
-        <p:nvPicPr>
-          <p:cNvPr id="8" name="Espaço Reservado para Conteúdo 4">
-            <a:extLst>
-              <a:ext uri="{FF2B5EF4-FFF2-40B4-BE49-F238E27FC236}">
-                <a16:creationId xmlns:a16="http://schemas.microsoft.com/office/drawing/2014/main" id="{65AB402D-D1A8-4F31-BA42-34A6F0FC69F9}"/>
-              </a:ext>
-            </a:extLst>
-          </p:cNvPr>
-          <p:cNvPicPr>
-            <a:picLocks noChangeAspect="1"/>
-          </p:cNvPicPr>
-          <p:nvPr/>
-        </p:nvPicPr>
-        <p:blipFill>
-          <a:blip r:embed="rId2">
-            <a:extLst>
-              <a:ext uri="{28A0092B-C50C-407E-A947-70E740481C1C}">
-                <a14:useLocalDpi xmlns:a14="http://schemas.microsoft.com/office/drawing/2010/main" val="0"/>
-              </a:ext>
-            </a:extLst>
-          </a:blip>
-          <a:stretch>
-            <a:fillRect/>
-          </a:stretch>
-        </p:blipFill>
-        <p:spPr>
-          <a:xfrm>
-            <a:off x="62144" y="112237"/>
-            <a:ext cx="588096" cy="1228523"/>
-          </a:xfrm>
-          <a:prstGeom prst="rect">
-            <a:avLst/>
-          </a:prstGeom>
-        </p:spPr>
-      </p:pic>
-    </p:spTree>
-    <p:extLst>
-      <p:ext uri="{BB962C8B-B14F-4D97-AF65-F5344CB8AC3E}">
-        <p14:creationId xmlns:p14="http://schemas.microsoft.com/office/powerpoint/2010/main" val="1670738953"/>
-      </p:ext>
-    </p:extLst>
-  </p:cSld>
-  <p:clrMapOvr>
-    <a:masterClrMapping/>
-  </p:clrMapOvr>
-</p:sld>
-</file>
-
-<file path=ppt/slides/slide6.xml><?xml version="1.0" encoding="utf-8"?>
-<p:sld xmlns:a="http://schemas.openxmlformats.org/drawingml/2006/main" xmlns:r="http://schemas.openxmlformats.org/officeDocument/2006/relationships" xmlns:p="http://schemas.openxmlformats.org/presentationml/2006/main">
-  <p:cSld>
-    <p:spTree>
-      <p:nvGrpSpPr>
-        <p:cNvPr id="1" name=""/>
-        <p:cNvGrpSpPr/>
-        <p:nvPr/>
-      </p:nvGrpSpPr>
-      <p:grpSpPr>
-        <a:xfrm>
-          <a:off x="0" y="0"/>
-          <a:ext cx="0" cy="0"/>
-          <a:chOff x="0" y="0"/>
-          <a:chExt cx="0" cy="0"/>
-        </a:xfrm>
-      </p:grpSpPr>
-      <p:sp>
-        <p:nvSpPr>
-          <p:cNvPr id="2" name="Título 1">
-            <a:extLst>
-              <a:ext uri="{FF2B5EF4-FFF2-40B4-BE49-F238E27FC236}">
-                <a16:creationId xmlns:a16="http://schemas.microsoft.com/office/drawing/2014/main" id="{BC798918-7CB4-450A-A042-F0B538CA25DE}"/>
-              </a:ext>
-            </a:extLst>
-          </p:cNvPr>
-          <p:cNvSpPr>
-            <a:spLocks noGrp="1"/>
-          </p:cNvSpPr>
-          <p:nvPr>
-            <p:ph type="title"/>
-          </p:nvPr>
-        </p:nvSpPr>
-        <p:spPr>
-          <a:xfrm>
-            <a:off x="1032611" y="0"/>
-            <a:ext cx="10827959" cy="1574800"/>
-          </a:xfrm>
-        </p:spPr>
-        <p:txBody>
-          <a:bodyPr>
-            <a:normAutofit/>
-          </a:bodyPr>
-          <a:lstStyle/>
-          <a:p>
-            <a:pPr algn="ctr"/>
-            <a:r>
-              <a:rPr lang="pt-BR" dirty="0">
-                <a:latin typeface="AlternateGothic2 BT" panose="020B0608020202050204" pitchFamily="34" charset="0"/>
-              </a:rPr>
-              <a:t>CEA055 – Estatística e Probabilidade</a:t>
-            </a:r>
-            <a:br>
-              <a:rPr lang="pt-BR" dirty="0">
-                <a:latin typeface="AlternateGothic2 BT" panose="020B0608020202050204" pitchFamily="34" charset="0"/>
-              </a:rPr>
-            </a:br>
-            <a:r>
-              <a:rPr lang="pt-BR" sz="2200" b="1" dirty="0"/>
-              <a:t>Estimação</a:t>
-            </a:r>
-            <a:endParaRPr lang="pt-BR" dirty="0">
-              <a:latin typeface="AlternateGothic2 BT" panose="020B0608020202050204" pitchFamily="34" charset="0"/>
-            </a:endParaRPr>
-          </a:p>
-        </p:txBody>
-      </p:sp>
       <mc:AlternateContent xmlns:mc="http://schemas.openxmlformats.org/markup-compatibility/2006" xmlns:a14="http://schemas.microsoft.com/office/drawing/2010/main">
         <mc:Choice Requires="a14">
           <p:sp>
@@ -7549,7 +7327,7 @@
         <p:spPr>
           <a:xfrm>
             <a:off x="361395" y="6488668"/>
-            <a:ext cx="2395336" cy="300210"/>
+            <a:ext cx="7620000" cy="300210"/>
           </a:xfrm>
           <a:prstGeom prst="rect">
             <a:avLst/>
@@ -7564,47 +7342,11 @@
           <a:p>
             <a:r>
               <a:rPr lang="pt-BR" sz="1351" dirty="0"/>
-              <a:t>Professor: Marcos Goulart Lima</a:t>
+              <a:t>CEA055 - Estatística e Probabilidade - Professor: Marcos Goulart Lima</a:t>
             </a:r>
           </a:p>
         </p:txBody>
       </p:sp>
-      <p:pic>
-        <p:nvPicPr>
-          <p:cNvPr id="8" name="Espaço Reservado para Conteúdo 4">
-            <a:extLst>
-              <a:ext uri="{FF2B5EF4-FFF2-40B4-BE49-F238E27FC236}">
-                <a16:creationId xmlns:a16="http://schemas.microsoft.com/office/drawing/2014/main" id="{65AB402D-D1A8-4F31-BA42-34A6F0FC69F9}"/>
-              </a:ext>
-            </a:extLst>
-          </p:cNvPr>
-          <p:cNvPicPr>
-            <a:picLocks noChangeAspect="1"/>
-          </p:cNvPicPr>
-          <p:nvPr/>
-        </p:nvPicPr>
-        <p:blipFill>
-          <a:blip r:embed="rId3">
-            <a:extLst>
-              <a:ext uri="{28A0092B-C50C-407E-A947-70E740481C1C}">
-                <a14:useLocalDpi xmlns:a14="http://schemas.microsoft.com/office/drawing/2010/main" val="0"/>
-              </a:ext>
-            </a:extLst>
-          </a:blip>
-          <a:stretch>
-            <a:fillRect/>
-          </a:stretch>
-        </p:blipFill>
-        <p:spPr>
-          <a:xfrm>
-            <a:off x="62144" y="112237"/>
-            <a:ext cx="588096" cy="1228523"/>
-          </a:xfrm>
-          <a:prstGeom prst="rect">
-            <a:avLst/>
-          </a:prstGeom>
-        </p:spPr>
-      </p:pic>
     </p:spTree>
     <p:extLst>
       <p:ext uri="{BB962C8B-B14F-4D97-AF65-F5344CB8AC3E}">
@@ -7618,7 +7360,7 @@
 </p:sld>
 </file>
 
-<file path=ppt/slides/slide7.xml><?xml version="1.0" encoding="utf-8"?>
+<file path=ppt/slides/slide8.xml><?xml version="1.0" encoding="utf-8"?>
 <p:sld xmlns:a="http://schemas.openxmlformats.org/drawingml/2006/main" xmlns:r="http://schemas.openxmlformats.org/officeDocument/2006/relationships" xmlns:p="http://schemas.openxmlformats.org/presentationml/2006/main">
   <p:cSld>
     <p:spTree>
@@ -7635,56 +7377,6 @@
           <a:chExt cx="0" cy="0"/>
         </a:xfrm>
       </p:grpSpPr>
-      <p:sp>
-        <p:nvSpPr>
-          <p:cNvPr id="2" name="Título 1">
-            <a:extLst>
-              <a:ext uri="{FF2B5EF4-FFF2-40B4-BE49-F238E27FC236}">
-                <a16:creationId xmlns:a16="http://schemas.microsoft.com/office/drawing/2014/main" id="{BC798918-7CB4-450A-A042-F0B538CA25DE}"/>
-              </a:ext>
-            </a:extLst>
-          </p:cNvPr>
-          <p:cNvSpPr>
-            <a:spLocks noGrp="1"/>
-          </p:cNvSpPr>
-          <p:nvPr>
-            <p:ph type="title"/>
-          </p:nvPr>
-        </p:nvSpPr>
-        <p:spPr>
-          <a:xfrm>
-            <a:off x="1032611" y="0"/>
-            <a:ext cx="10827959" cy="1574800"/>
-          </a:xfrm>
-        </p:spPr>
-        <p:txBody>
-          <a:bodyPr>
-            <a:normAutofit/>
-          </a:bodyPr>
-          <a:lstStyle/>
-          <a:p>
-            <a:pPr algn="ctr"/>
-            <a:r>
-              <a:rPr lang="pt-BR" dirty="0">
-                <a:latin typeface="AlternateGothic2 BT" panose="020B0608020202050204" pitchFamily="34" charset="0"/>
-              </a:rPr>
-              <a:t>CEA055 – Estatística e Probabilidade</a:t>
-            </a:r>
-            <a:br>
-              <a:rPr lang="pt-BR" dirty="0">
-                <a:latin typeface="AlternateGothic2 BT" panose="020B0608020202050204" pitchFamily="34" charset="0"/>
-              </a:rPr>
-            </a:br>
-            <a:r>
-              <a:rPr lang="pt-BR" sz="2200" b="1" dirty="0"/>
-              <a:t>Estimação</a:t>
-            </a:r>
-            <a:endParaRPr lang="pt-BR" dirty="0">
-              <a:latin typeface="AlternateGothic2 BT" panose="020B0608020202050204" pitchFamily="34" charset="0"/>
-            </a:endParaRPr>
-          </a:p>
-        </p:txBody>
-      </p:sp>
       <mc:AlternateContent xmlns:mc="http://schemas.openxmlformats.org/markup-compatibility/2006">
         <mc:Choice xmlns:a14="http://schemas.microsoft.com/office/drawing/2010/main" Requires="a14">
           <p:sp>
@@ -9086,7 +8778,7 @@
         <p:spPr>
           <a:xfrm>
             <a:off x="361395" y="6488668"/>
-            <a:ext cx="2395336" cy="300210"/>
+            <a:ext cx="7620000" cy="300210"/>
           </a:xfrm>
           <a:prstGeom prst="rect">
             <a:avLst/>
@@ -9101,47 +8793,11 @@
           <a:p>
             <a:r>
               <a:rPr lang="pt-BR" sz="1351" dirty="0"/>
-              <a:t>Professor: Marcos Goulart Lima</a:t>
+              <a:t>CEA055 - Estatística e Probabilidade - Professor: Marcos Goulart Lima</a:t>
             </a:r>
           </a:p>
         </p:txBody>
       </p:sp>
-      <p:pic>
-        <p:nvPicPr>
-          <p:cNvPr id="8" name="Espaço Reservado para Conteúdo 4">
-            <a:extLst>
-              <a:ext uri="{FF2B5EF4-FFF2-40B4-BE49-F238E27FC236}">
-                <a16:creationId xmlns:a16="http://schemas.microsoft.com/office/drawing/2014/main" id="{65AB402D-D1A8-4F31-BA42-34A6F0FC69F9}"/>
-              </a:ext>
-            </a:extLst>
-          </p:cNvPr>
-          <p:cNvPicPr>
-            <a:picLocks noChangeAspect="1"/>
-          </p:cNvPicPr>
-          <p:nvPr/>
-        </p:nvPicPr>
-        <p:blipFill>
-          <a:blip r:embed="rId3">
-            <a:extLst>
-              <a:ext uri="{28A0092B-C50C-407E-A947-70E740481C1C}">
-                <a14:useLocalDpi xmlns:a14="http://schemas.microsoft.com/office/drawing/2010/main" val="0"/>
-              </a:ext>
-            </a:extLst>
-          </a:blip>
-          <a:stretch>
-            <a:fillRect/>
-          </a:stretch>
-        </p:blipFill>
-        <p:spPr>
-          <a:xfrm>
-            <a:off x="62144" y="112237"/>
-            <a:ext cx="588096" cy="1228523"/>
-          </a:xfrm>
-          <a:prstGeom prst="rect">
-            <a:avLst/>
-          </a:prstGeom>
-        </p:spPr>
-      </p:pic>
     </p:spTree>
     <p:extLst>
       <p:ext uri="{BB962C8B-B14F-4D97-AF65-F5344CB8AC3E}">
@@ -9155,7 +8811,7 @@
 </p:sld>
 </file>
 
-<file path=ppt/slides/slide8.xml><?xml version="1.0" encoding="utf-8"?>
+<file path=ppt/slides/slide9.xml><?xml version="1.0" encoding="utf-8"?>
 <p:sld xmlns:a="http://schemas.openxmlformats.org/drawingml/2006/main" xmlns:r="http://schemas.openxmlformats.org/officeDocument/2006/relationships" xmlns:p="http://schemas.openxmlformats.org/presentationml/2006/main">
   <p:cSld>
     <p:spTree>
@@ -9172,56 +8828,6 @@
           <a:chExt cx="0" cy="0"/>
         </a:xfrm>
       </p:grpSpPr>
-      <p:sp>
-        <p:nvSpPr>
-          <p:cNvPr id="2" name="Título 1">
-            <a:extLst>
-              <a:ext uri="{FF2B5EF4-FFF2-40B4-BE49-F238E27FC236}">
-                <a16:creationId xmlns:a16="http://schemas.microsoft.com/office/drawing/2014/main" id="{BC798918-7CB4-450A-A042-F0B538CA25DE}"/>
-              </a:ext>
-            </a:extLst>
-          </p:cNvPr>
-          <p:cNvSpPr>
-            <a:spLocks noGrp="1"/>
-          </p:cNvSpPr>
-          <p:nvPr>
-            <p:ph type="title"/>
-          </p:nvPr>
-        </p:nvSpPr>
-        <p:spPr>
-          <a:xfrm>
-            <a:off x="1032611" y="0"/>
-            <a:ext cx="10827959" cy="1574800"/>
-          </a:xfrm>
-        </p:spPr>
-        <p:txBody>
-          <a:bodyPr>
-            <a:normAutofit/>
-          </a:bodyPr>
-          <a:lstStyle/>
-          <a:p>
-            <a:pPr algn="ctr"/>
-            <a:r>
-              <a:rPr lang="pt-BR" dirty="0">
-                <a:latin typeface="AlternateGothic2 BT" panose="020B0608020202050204" pitchFamily="34" charset="0"/>
-              </a:rPr>
-              <a:t>CEA055 – Estatística e Probabilidade</a:t>
-            </a:r>
-            <a:br>
-              <a:rPr lang="pt-BR" dirty="0">
-                <a:latin typeface="AlternateGothic2 BT" panose="020B0608020202050204" pitchFamily="34" charset="0"/>
-              </a:rPr>
-            </a:br>
-            <a:r>
-              <a:rPr lang="pt-BR" sz="2200" b="1" dirty="0"/>
-              <a:t>Estimação</a:t>
-            </a:r>
-            <a:endParaRPr lang="pt-BR" dirty="0">
-              <a:latin typeface="AlternateGothic2 BT" panose="020B0608020202050204" pitchFamily="34" charset="0"/>
-            </a:endParaRPr>
-          </a:p>
-        </p:txBody>
-      </p:sp>
       <mc:AlternateContent xmlns:mc="http://schemas.openxmlformats.org/markup-compatibility/2006">
         <mc:Choice xmlns:a14="http://schemas.microsoft.com/office/drawing/2010/main" Requires="a14">
           <p:sp>
@@ -10131,7 +9737,7 @@
         <p:spPr>
           <a:xfrm>
             <a:off x="361395" y="6488668"/>
-            <a:ext cx="2395336" cy="300210"/>
+            <a:ext cx="7620000" cy="300210"/>
           </a:xfrm>
           <a:prstGeom prst="rect">
             <a:avLst/>
@@ -10146,617 +9752,15 @@
           <a:p>
             <a:r>
               <a:rPr lang="pt-BR" sz="1351" dirty="0"/>
-              <a:t>Professor: Marcos Goulart Lima</a:t>
+              <a:t>CEA055 - Estatística e Probabilidade - Professor: Marcos Goulart Lima</a:t>
             </a:r>
           </a:p>
         </p:txBody>
       </p:sp>
-      <p:pic>
-        <p:nvPicPr>
-          <p:cNvPr id="8" name="Espaço Reservado para Conteúdo 4">
-            <a:extLst>
-              <a:ext uri="{FF2B5EF4-FFF2-40B4-BE49-F238E27FC236}">
-                <a16:creationId xmlns:a16="http://schemas.microsoft.com/office/drawing/2014/main" id="{65AB402D-D1A8-4F31-BA42-34A6F0FC69F9}"/>
-              </a:ext>
-            </a:extLst>
-          </p:cNvPr>
-          <p:cNvPicPr>
-            <a:picLocks noChangeAspect="1"/>
-          </p:cNvPicPr>
-          <p:nvPr/>
-        </p:nvPicPr>
-        <p:blipFill>
-          <a:blip r:embed="rId3">
-            <a:extLst>
-              <a:ext uri="{28A0092B-C50C-407E-A947-70E740481C1C}">
-                <a14:useLocalDpi xmlns:a14="http://schemas.microsoft.com/office/drawing/2010/main" val="0"/>
-              </a:ext>
-            </a:extLst>
-          </a:blip>
-          <a:stretch>
-            <a:fillRect/>
-          </a:stretch>
-        </p:blipFill>
-        <p:spPr>
-          <a:xfrm>
-            <a:off x="62144" y="112237"/>
-            <a:ext cx="588096" cy="1228523"/>
-          </a:xfrm>
-          <a:prstGeom prst="rect">
-            <a:avLst/>
-          </a:prstGeom>
-        </p:spPr>
-      </p:pic>
     </p:spTree>
     <p:extLst>
       <p:ext uri="{BB962C8B-B14F-4D97-AF65-F5344CB8AC3E}">
         <p14:creationId xmlns:p14="http://schemas.microsoft.com/office/powerpoint/2010/main" val="9154472"/>
-      </p:ext>
-    </p:extLst>
-  </p:cSld>
-  <p:clrMapOvr>
-    <a:masterClrMapping/>
-  </p:clrMapOvr>
-</p:sld>
-</file>
-
-<file path=ppt/slides/slide9.xml><?xml version="1.0" encoding="utf-8"?>
-<p:sld xmlns:a="http://schemas.openxmlformats.org/drawingml/2006/main" xmlns:r="http://schemas.openxmlformats.org/officeDocument/2006/relationships" xmlns:p="http://schemas.openxmlformats.org/presentationml/2006/main">
-  <p:cSld>
-    <p:spTree>
-      <p:nvGrpSpPr>
-        <p:cNvPr id="1" name=""/>
-        <p:cNvGrpSpPr/>
-        <p:nvPr/>
-      </p:nvGrpSpPr>
-      <p:grpSpPr>
-        <a:xfrm>
-          <a:off x="0" y="0"/>
-          <a:ext cx="0" cy="0"/>
-          <a:chOff x="0" y="0"/>
-          <a:chExt cx="0" cy="0"/>
-        </a:xfrm>
-      </p:grpSpPr>
-      <p:sp>
-        <p:nvSpPr>
-          <p:cNvPr id="2" name="Título 1">
-            <a:extLst>
-              <a:ext uri="{FF2B5EF4-FFF2-40B4-BE49-F238E27FC236}">
-                <a16:creationId xmlns:a16="http://schemas.microsoft.com/office/drawing/2014/main" id="{BC798918-7CB4-450A-A042-F0B538CA25DE}"/>
-              </a:ext>
-            </a:extLst>
-          </p:cNvPr>
-          <p:cNvSpPr>
-            <a:spLocks noGrp="1"/>
-          </p:cNvSpPr>
-          <p:nvPr>
-            <p:ph type="title"/>
-          </p:nvPr>
-        </p:nvSpPr>
-        <p:spPr>
-          <a:xfrm>
-            <a:off x="1032611" y="0"/>
-            <a:ext cx="10827959" cy="1574800"/>
-          </a:xfrm>
-        </p:spPr>
-        <p:txBody>
-          <a:bodyPr>
-            <a:normAutofit/>
-          </a:bodyPr>
-          <a:lstStyle/>
-          <a:p>
-            <a:pPr algn="ctr"/>
-            <a:r>
-              <a:rPr lang="pt-BR" dirty="0">
-                <a:latin typeface="AlternateGothic2 BT" panose="020B0608020202050204" pitchFamily="34" charset="0"/>
-              </a:rPr>
-              <a:t>CEA055 – Estatística e Probabilidade</a:t>
-            </a:r>
-            <a:br>
-              <a:rPr lang="pt-BR" dirty="0">
-                <a:latin typeface="AlternateGothic2 BT" panose="020B0608020202050204" pitchFamily="34" charset="0"/>
-              </a:rPr>
-            </a:br>
-            <a:r>
-              <a:rPr lang="pt-BR" sz="2200" b="1" dirty="0"/>
-              <a:t>Estimação</a:t>
-            </a:r>
-            <a:endParaRPr lang="pt-BR" dirty="0">
-              <a:latin typeface="AlternateGothic2 BT" panose="020B0608020202050204" pitchFamily="34" charset="0"/>
-            </a:endParaRPr>
-          </a:p>
-        </p:txBody>
-      </p:sp>
-      <mc:AlternateContent xmlns:mc="http://schemas.openxmlformats.org/markup-compatibility/2006">
-        <mc:Choice xmlns:a14="http://schemas.microsoft.com/office/drawing/2010/main" Requires="a14">
-          <p:sp>
-            <p:nvSpPr>
-              <p:cNvPr id="6" name="CaixaDeTexto 5">
-                <a:extLst>
-                  <a:ext uri="{FF2B5EF4-FFF2-40B4-BE49-F238E27FC236}">
-                    <a16:creationId xmlns:a16="http://schemas.microsoft.com/office/drawing/2014/main" id="{720B10DA-C761-4DEE-8D86-E170E1C2E981}"/>
-                  </a:ext>
-                </a:extLst>
-              </p:cNvPr>
-              <p:cNvSpPr txBox="1"/>
-              <p:nvPr/>
-            </p:nvSpPr>
-            <p:spPr>
-              <a:xfrm>
-                <a:off x="881687" y="1506234"/>
-                <a:ext cx="10618651" cy="3575979"/>
-              </a:xfrm>
-              <a:prstGeom prst="rect">
-                <a:avLst/>
-              </a:prstGeom>
-              <a:noFill/>
-            </p:spPr>
-            <p:txBody>
-              <a:bodyPr wrap="square" rtlCol="0">
-                <a:spAutoFit/>
-              </a:bodyPr>
-              <a:lstStyle/>
-              <a:p>
-                <a:r>
-                  <a:rPr lang="pt-BR" sz="2800" dirty="0"/>
-                  <a:t xml:space="preserve">c) Eficiência. </a:t>
-                </a:r>
-                <a:r>
-                  <a:rPr lang="pt-BR" sz="2800" b="1" dirty="0"/>
-                  <a:t xml:space="preserve"> </a:t>
-                </a:r>
-                <a:r>
-                  <a:rPr lang="pt-BR" sz="2800" dirty="0"/>
-                  <a:t xml:space="preserve">Se </a:t>
-                </a:r>
-                <a14:m>
-                  <m:oMath xmlns:m="http://schemas.openxmlformats.org/officeDocument/2006/math">
-                    <m:r>
-                      <a:rPr lang="pt-BR" sz="2800" i="1" dirty="0" smtClean="0">
-                        <a:latin typeface="Cambria Math" panose="02040503050406030204" pitchFamily="18" charset="0"/>
-                      </a:rPr>
-                      <m:t>𝑇</m:t>
-                    </m:r>
-                  </m:oMath>
-                </a14:m>
-                <a:r>
-                  <a:rPr lang="pt-BR" sz="2800" dirty="0"/>
-                  <a:t xml:space="preserve"> e </a:t>
-                </a:r>
-                <a14:m>
-                  <m:oMath xmlns:m="http://schemas.openxmlformats.org/officeDocument/2006/math">
-                    <m:r>
-                      <a:rPr lang="pt-BR" sz="2800" i="1" dirty="0" smtClean="0">
-                        <a:latin typeface="Cambria Math" panose="02040503050406030204" pitchFamily="18" charset="0"/>
-                      </a:rPr>
-                      <m:t>𝑇</m:t>
-                    </m:r>
-                    <m:r>
-                      <a:rPr lang="pt-BR" sz="2800" i="1" dirty="0" smtClean="0">
-                        <a:latin typeface="Cambria Math" panose="02040503050406030204" pitchFamily="18" charset="0"/>
-                      </a:rPr>
-                      <m:t>’</m:t>
-                    </m:r>
-                  </m:oMath>
-                </a14:m>
-                <a:r>
-                  <a:rPr lang="pt-BR" sz="2800" dirty="0"/>
-                  <a:t xml:space="preserve"> são dois estimadores não-viesados de um mesmo parâmetro </a:t>
-                </a:r>
-                <a14:m>
-                  <m:oMath xmlns:m="http://schemas.openxmlformats.org/officeDocument/2006/math">
-                    <m:r>
-                      <a:rPr lang="pt-BR" sz="2800" i="1" dirty="0" smtClean="0">
-                        <a:latin typeface="Cambria Math" panose="02040503050406030204" pitchFamily="18" charset="0"/>
-                      </a:rPr>
-                      <m:t>𝜃</m:t>
-                    </m:r>
-                  </m:oMath>
-                </a14:m>
-                <a:r>
-                  <a:rPr lang="pt-BR" sz="2800" dirty="0"/>
-                  <a:t xml:space="preserve">, e ainda </a:t>
-                </a:r>
-                <a:endParaRPr lang="pt-BR" sz="2800" i="1" dirty="0">
-                  <a:latin typeface="Cambria Math" panose="02040503050406030204" pitchFamily="18" charset="0"/>
-                </a:endParaRPr>
-              </a:p>
-              <a:p>
-                <a:pPr/>
-                <a14:m>
-                  <m:oMathPara xmlns:m="http://schemas.openxmlformats.org/officeDocument/2006/math">
-                    <m:oMathParaPr>
-                      <m:jc m:val="centerGroup"/>
-                    </m:oMathParaPr>
-                    <m:oMath xmlns:m="http://schemas.openxmlformats.org/officeDocument/2006/math">
-                      <m:r>
-                        <a:rPr lang="pt-BR" sz="2800" i="1" dirty="0" smtClean="0">
-                          <a:latin typeface="Cambria Math" panose="02040503050406030204" pitchFamily="18" charset="0"/>
-                        </a:rPr>
-                        <m:t>𝑉𝑎𝑟</m:t>
-                      </m:r>
-                      <m:d>
-                        <m:dPr>
-                          <m:ctrlPr>
-                            <a:rPr lang="pt-BR" sz="2800" i="1" dirty="0" smtClean="0">
-                              <a:latin typeface="Cambria Math" panose="02040503050406030204" pitchFamily="18" charset="0"/>
-                            </a:rPr>
-                          </m:ctrlPr>
-                        </m:dPr>
-                        <m:e>
-                          <m:r>
-                            <a:rPr lang="pt-BR" sz="2800" i="1" dirty="0" smtClean="0">
-                              <a:latin typeface="Cambria Math" panose="02040503050406030204" pitchFamily="18" charset="0"/>
-                            </a:rPr>
-                            <m:t>𝑇</m:t>
-                          </m:r>
-                        </m:e>
-                      </m:d>
-                      <m:r>
-                        <a:rPr lang="pt-BR" sz="2800" i="1" dirty="0" smtClean="0">
-                          <a:latin typeface="Cambria Math" panose="02040503050406030204" pitchFamily="18" charset="0"/>
-                        </a:rPr>
-                        <m:t>&lt; </m:t>
-                      </m:r>
-                      <m:r>
-                        <a:rPr lang="pt-BR" sz="2800" i="1" dirty="0" smtClean="0">
-                          <a:latin typeface="Cambria Math" panose="02040503050406030204" pitchFamily="18" charset="0"/>
-                        </a:rPr>
-                        <m:t>𝑉𝑎𝑟</m:t>
-                      </m:r>
-                      <m:d>
-                        <m:dPr>
-                          <m:ctrlPr>
-                            <a:rPr lang="pt-BR" sz="2800" i="1" dirty="0" smtClean="0">
-                              <a:latin typeface="Cambria Math" panose="02040503050406030204" pitchFamily="18" charset="0"/>
-                            </a:rPr>
-                          </m:ctrlPr>
-                        </m:dPr>
-                        <m:e>
-                          <m:r>
-                            <a:rPr lang="pt-BR" sz="2800" i="1" dirty="0" smtClean="0">
-                              <a:latin typeface="Cambria Math" panose="02040503050406030204" pitchFamily="18" charset="0"/>
-                            </a:rPr>
-                            <m:t>𝑇</m:t>
-                          </m:r>
-                          <m:r>
-                            <a:rPr lang="pt-BR" sz="2800" i="1" dirty="0" smtClean="0">
-                              <a:latin typeface="Cambria Math" panose="02040503050406030204" pitchFamily="18" charset="0"/>
-                            </a:rPr>
-                            <m:t>’</m:t>
-                          </m:r>
-                        </m:e>
-                      </m:d>
-                      <m:r>
-                        <a:rPr lang="pt-BR" sz="2800" b="0" i="1" dirty="0" smtClean="0">
-                          <a:latin typeface="Cambria Math" panose="02040503050406030204" pitchFamily="18" charset="0"/>
-                        </a:rPr>
-                        <m:t>,</m:t>
-                      </m:r>
-                    </m:oMath>
-                  </m:oMathPara>
-                </a14:m>
-                <a:endParaRPr lang="pt-BR" sz="2800" dirty="0"/>
-              </a:p>
-              <a:p>
-                <a:endParaRPr lang="pt-BR" sz="2800" dirty="0"/>
-              </a:p>
-              <a:p>
-                <a:r>
-                  <a:rPr lang="pt-BR" sz="2800" dirty="0"/>
-                  <a:t xml:space="preserve">então </a:t>
-                </a:r>
-                <a14:m>
-                  <m:oMath xmlns:m="http://schemas.openxmlformats.org/officeDocument/2006/math">
-                    <m:r>
-                      <a:rPr lang="pt-BR" sz="2800" i="1" dirty="0" smtClean="0">
-                        <a:latin typeface="Cambria Math" panose="02040503050406030204" pitchFamily="18" charset="0"/>
-                      </a:rPr>
-                      <m:t>𝑇</m:t>
-                    </m:r>
-                  </m:oMath>
-                </a14:m>
-                <a:r>
-                  <a:rPr lang="pt-BR" sz="2800" dirty="0"/>
-                  <a:t xml:space="preserve"> diz-se mais eficiente do que </a:t>
-                </a:r>
-                <a14:m>
-                  <m:oMath xmlns:m="http://schemas.openxmlformats.org/officeDocument/2006/math">
-                    <m:r>
-                      <a:rPr lang="pt-BR" sz="2800" i="1" dirty="0" smtClean="0">
-                        <a:latin typeface="Cambria Math" panose="02040503050406030204" pitchFamily="18" charset="0"/>
-                      </a:rPr>
-                      <m:t>𝑇</m:t>
-                    </m:r>
-                    <m:r>
-                      <a:rPr lang="pt-BR" sz="2800" i="1" dirty="0" smtClean="0">
-                        <a:latin typeface="Cambria Math" panose="02040503050406030204" pitchFamily="18" charset="0"/>
-                      </a:rPr>
-                      <m:t>’</m:t>
-                    </m:r>
-                  </m:oMath>
-                </a14:m>
-                <a:r>
-                  <a:rPr lang="pt-BR" sz="2800" dirty="0"/>
-                  <a:t>.</a:t>
-                </a:r>
-              </a:p>
-              <a:p>
-                <a:endParaRPr lang="pt-BR" sz="2800" dirty="0"/>
-              </a:p>
-              <a:p>
-                <a:r>
-                  <a:rPr lang="pt-BR" sz="2800" dirty="0"/>
-                  <a:t xml:space="preserve">d) Suficiência. O estimador </a:t>
-                </a:r>
-                <a14:m>
-                  <m:oMath xmlns:m="http://schemas.openxmlformats.org/officeDocument/2006/math">
-                    <m:acc>
-                      <m:accPr>
-                        <m:chr m:val="̂"/>
-                        <m:ctrlPr>
-                          <a:rPr lang="pt-BR" sz="2800" i="1" smtClean="0">
-                            <a:latin typeface="Cambria Math" panose="02040503050406030204" pitchFamily="18" charset="0"/>
-                          </a:rPr>
-                        </m:ctrlPr>
-                      </m:accPr>
-                      <m:e>
-                        <m:r>
-                          <a:rPr lang="pt-BR" sz="2800" b="0" i="1" smtClean="0">
-                            <a:latin typeface="Cambria Math" panose="02040503050406030204" pitchFamily="18" charset="0"/>
-                          </a:rPr>
-                          <m:t>𝜃</m:t>
-                        </m:r>
-                      </m:e>
-                    </m:acc>
-                  </m:oMath>
-                </a14:m>
-                <a:r>
-                  <a:rPr lang="pt-BR" sz="2800" dirty="0"/>
-                  <a:t xml:space="preserve"> de </a:t>
-                </a:r>
-                <a14:m>
-                  <m:oMath xmlns:m="http://schemas.openxmlformats.org/officeDocument/2006/math">
-                    <m:r>
-                      <a:rPr lang="pt-BR" sz="2800" b="0" i="1" smtClean="0">
-                        <a:latin typeface="Cambria Math" panose="02040503050406030204" pitchFamily="18" charset="0"/>
-                      </a:rPr>
-                      <m:t>𝜃</m:t>
-                    </m:r>
-                  </m:oMath>
-                </a14:m>
-                <a:r>
-                  <a:rPr lang="pt-BR" sz="2800" dirty="0"/>
-                  <a:t xml:space="preserve"> é suficiente se, para qualquer outro estimador </a:t>
-                </a:r>
-                <a14:m>
-                  <m:oMath xmlns:m="http://schemas.openxmlformats.org/officeDocument/2006/math">
-                    <m:sSub>
-                      <m:sSubPr>
-                        <m:ctrlPr>
-                          <a:rPr lang="pt-BR" sz="2800" b="0" i="1" smtClean="0">
-                            <a:latin typeface="Cambria Math" panose="02040503050406030204" pitchFamily="18" charset="0"/>
-                          </a:rPr>
-                        </m:ctrlPr>
-                      </m:sSubPr>
-                      <m:e>
-                        <m:acc>
-                          <m:accPr>
-                            <m:chr m:val="̂"/>
-                            <m:ctrlPr>
-                              <a:rPr lang="pt-BR" sz="2800" i="1">
-                                <a:latin typeface="Cambria Math" panose="02040503050406030204" pitchFamily="18" charset="0"/>
-                              </a:rPr>
-                            </m:ctrlPr>
-                          </m:accPr>
-                          <m:e>
-                            <m:r>
-                              <a:rPr lang="pt-BR" sz="2800" i="1">
-                                <a:latin typeface="Cambria Math" panose="02040503050406030204" pitchFamily="18" charset="0"/>
-                              </a:rPr>
-                              <m:t>𝜃</m:t>
-                            </m:r>
-                          </m:e>
-                        </m:acc>
-                      </m:e>
-                      <m:sub>
-                        <m:r>
-                          <a:rPr lang="pt-BR" sz="2800" b="0" i="1" smtClean="0">
-                            <a:latin typeface="Cambria Math" panose="02040503050406030204" pitchFamily="18" charset="0"/>
-                          </a:rPr>
-                          <m:t>𝑘</m:t>
-                        </m:r>
-                      </m:sub>
-                    </m:sSub>
-                  </m:oMath>
-                </a14:m>
-                <a:r>
-                  <a:rPr lang="pt-BR" sz="2800" dirty="0"/>
-                  <a:t xml:space="preserve">, a distribuição de </a:t>
-                </a:r>
-                <a14:m>
-                  <m:oMath xmlns:m="http://schemas.openxmlformats.org/officeDocument/2006/math">
-                    <m:sSub>
-                      <m:sSubPr>
-                        <m:ctrlPr>
-                          <a:rPr lang="pt-BR" sz="2800" i="1">
-                            <a:latin typeface="Cambria Math" panose="02040503050406030204" pitchFamily="18" charset="0"/>
-                          </a:rPr>
-                        </m:ctrlPr>
-                      </m:sSubPr>
-                      <m:e>
-                        <m:acc>
-                          <m:accPr>
-                            <m:chr m:val="̂"/>
-                            <m:ctrlPr>
-                              <a:rPr lang="pt-BR" sz="2800" i="1">
-                                <a:latin typeface="Cambria Math" panose="02040503050406030204" pitchFamily="18" charset="0"/>
-                              </a:rPr>
-                            </m:ctrlPr>
-                          </m:accPr>
-                          <m:e>
-                            <m:r>
-                              <a:rPr lang="pt-BR" sz="2800" i="1">
-                                <a:latin typeface="Cambria Math" panose="02040503050406030204" pitchFamily="18" charset="0"/>
-                              </a:rPr>
-                              <m:t>𝜃</m:t>
-                            </m:r>
-                          </m:e>
-                        </m:acc>
-                      </m:e>
-                      <m:sub>
-                        <m:r>
-                          <a:rPr lang="pt-BR" sz="2800" i="1">
-                            <a:latin typeface="Cambria Math" panose="02040503050406030204" pitchFamily="18" charset="0"/>
-                          </a:rPr>
-                          <m:t>𝑘</m:t>
-                        </m:r>
-                      </m:sub>
-                    </m:sSub>
-                  </m:oMath>
-                </a14:m>
-                <a:r>
-                  <a:rPr lang="pt-BR" sz="2800" dirty="0"/>
-                  <a:t xml:space="preserve"> for independente de </a:t>
-                </a:r>
-                <a14:m>
-                  <m:oMath xmlns:m="http://schemas.openxmlformats.org/officeDocument/2006/math">
-                    <m:r>
-                      <a:rPr lang="pt-BR" sz="2800" b="0" i="1" dirty="0" smtClean="0">
-                        <a:latin typeface="Cambria Math" panose="02040503050406030204" pitchFamily="18" charset="0"/>
-                      </a:rPr>
-                      <m:t>𝜃</m:t>
-                    </m:r>
-                  </m:oMath>
-                </a14:m>
-                <a:r>
-                  <a:rPr lang="pt-BR" sz="2800" dirty="0"/>
-                  <a:t>.</a:t>
-                </a:r>
-              </a:p>
-            </p:txBody>
-          </p:sp>
-        </mc:Choice>
-        <mc:Fallback>
-          <p:sp>
-            <p:nvSpPr>
-              <p:cNvPr id="6" name="CaixaDeTexto 5">
-                <a:extLst>
-                  <a:ext uri="{FF2B5EF4-FFF2-40B4-BE49-F238E27FC236}">
-                    <a16:creationId xmlns:a16="http://schemas.microsoft.com/office/drawing/2014/main" id="{720B10DA-C761-4DEE-8D86-E170E1C2E981}"/>
-                  </a:ext>
-                </a:extLst>
-              </p:cNvPr>
-              <p:cNvSpPr txBox="1">
-                <a:spLocks noRot="1" noChangeAspect="1" noMove="1" noResize="1" noEditPoints="1" noAdjustHandles="1" noChangeArrowheads="1" noChangeShapeType="1" noTextEdit="1"/>
-              </p:cNvSpPr>
-              <p:nvPr/>
-            </p:nvSpPr>
-            <p:spPr>
-              <a:xfrm>
-                <a:off x="881687" y="1506234"/>
-                <a:ext cx="10618651" cy="3575979"/>
-              </a:xfrm>
-              <a:prstGeom prst="rect">
-                <a:avLst/>
-              </a:prstGeom>
-              <a:blipFill>
-                <a:blip r:embed="rId2"/>
-                <a:stretch>
-                  <a:fillRect l="-1206" t="-1533" b="-3918"/>
-                </a:stretch>
-              </a:blipFill>
-            </p:spPr>
-            <p:txBody>
-              <a:bodyPr/>
-              <a:lstStyle/>
-              <a:p>
-                <a:r>
-                  <a:rPr lang="pt-BR">
-                    <a:noFill/>
-                  </a:rPr>
-                  <a:t> </a:t>
-                </a:r>
-              </a:p>
-            </p:txBody>
-          </p:sp>
-        </mc:Fallback>
-      </mc:AlternateContent>
-      <p:sp>
-        <p:nvSpPr>
-          <p:cNvPr id="3" name="CaixaDeTexto 2">
-            <a:extLst>
-              <a:ext uri="{FF2B5EF4-FFF2-40B4-BE49-F238E27FC236}">
-                <a16:creationId xmlns:a16="http://schemas.microsoft.com/office/drawing/2014/main" id="{19131A04-B5D6-4211-8B49-4615DE5797E9}"/>
-              </a:ext>
-            </a:extLst>
-          </p:cNvPr>
-          <p:cNvSpPr txBox="1"/>
-          <p:nvPr/>
-        </p:nvSpPr>
-        <p:spPr>
-          <a:xfrm>
-            <a:off x="361395" y="6488668"/>
-            <a:ext cx="2395336" cy="300210"/>
-          </a:xfrm>
-          <a:prstGeom prst="rect">
-            <a:avLst/>
-          </a:prstGeom>
-          <a:noFill/>
-        </p:spPr>
-        <p:txBody>
-          <a:bodyPr wrap="none" rtlCol="0">
-            <a:spAutoFit/>
-          </a:bodyPr>
-          <a:lstStyle/>
-          <a:p>
-            <a:r>
-              <a:rPr lang="pt-BR" sz="1351" dirty="0"/>
-              <a:t>Professor: Marcos Goulart Lima</a:t>
-            </a:r>
-          </a:p>
-        </p:txBody>
-      </p:sp>
-      <p:pic>
-        <p:nvPicPr>
-          <p:cNvPr id="8" name="Espaço Reservado para Conteúdo 4">
-            <a:extLst>
-              <a:ext uri="{FF2B5EF4-FFF2-40B4-BE49-F238E27FC236}">
-                <a16:creationId xmlns:a16="http://schemas.microsoft.com/office/drawing/2014/main" id="{65AB402D-D1A8-4F31-BA42-34A6F0FC69F9}"/>
-              </a:ext>
-            </a:extLst>
-          </p:cNvPr>
-          <p:cNvPicPr>
-            <a:picLocks noChangeAspect="1"/>
-          </p:cNvPicPr>
-          <p:nvPr/>
-        </p:nvPicPr>
-        <p:blipFill>
-          <a:blip r:embed="rId3">
-            <a:extLst>
-              <a:ext uri="{28A0092B-C50C-407E-A947-70E740481C1C}">
-                <a14:useLocalDpi xmlns:a14="http://schemas.microsoft.com/office/drawing/2010/main" val="0"/>
-              </a:ext>
-            </a:extLst>
-          </a:blip>
-          <a:stretch>
-            <a:fillRect/>
-          </a:stretch>
-        </p:blipFill>
-        <p:spPr>
-          <a:xfrm>
-            <a:off x="62144" y="112237"/>
-            <a:ext cx="588096" cy="1228523"/>
-          </a:xfrm>
-          <a:prstGeom prst="rect">
-            <a:avLst/>
-          </a:prstGeom>
-        </p:spPr>
-      </p:pic>
-    </p:spTree>
-    <p:extLst>
-      <p:ext uri="{BB962C8B-B14F-4D97-AF65-F5344CB8AC3E}">
-        <p14:creationId xmlns:p14="http://schemas.microsoft.com/office/powerpoint/2010/main" val="4211534115"/>
       </p:ext>
     </p:extLst>
   </p:cSld>
